--- a/PR2025-26_VMESNA_10.pptx
+++ b/PR2025-26_VMESNA_10.pptx
@@ -5,16 +5,17 @@
     <p:sldMasterId id="2147483660" r:id="rId1"/>
   </p:sldMasterIdLst>
   <p:notesMasterIdLst>
-    <p:notesMasterId r:id="rId6"/>
+    <p:notesMasterId r:id="rId7"/>
   </p:notesMasterIdLst>
   <p:handoutMasterIdLst>
-    <p:handoutMasterId r:id="rId7"/>
+    <p:handoutMasterId r:id="rId8"/>
   </p:handoutMasterIdLst>
   <p:sldIdLst>
     <p:sldId id="256" r:id="rId2"/>
     <p:sldId id="258" r:id="rId3"/>
-    <p:sldId id="260" r:id="rId4"/>
-    <p:sldId id="259" r:id="rId5"/>
+    <p:sldId id="261" r:id="rId4"/>
+    <p:sldId id="260" r:id="rId5"/>
+    <p:sldId id="259" r:id="rId6"/>
   </p:sldIdLst>
   <p:sldSz cx="9144000" cy="5143500" type="screen16x9"/>
   <p:notesSz cx="6858000" cy="9144000"/>
@@ -5499,7 +5500,7 @@
         </p:spPr>
         <p:txBody>
           <a:bodyPr>
-            <a:normAutofit/>
+            <a:normAutofit fontScale="92500" lnSpcReduction="20000"/>
           </a:bodyPr>
           <a:lstStyle/>
           <a:p>
@@ -5507,68 +5508,155 @@
               <a:buNone/>
             </a:pPr>
             <a:r>
-              <a:rPr lang="en-US" sz="1600" dirty="0" err="1"/>
-              <a:t>Kako</a:t>
-            </a:r>
-            <a:r>
               <a:rPr lang="en-US" sz="1600" dirty="0"/>
               <a:t> </a:t>
             </a:r>
             <a:r>
-              <a:rPr lang="en-US" sz="1600" dirty="0" err="1"/>
-              <a:t>boste</a:t>
-            </a:r>
-            <a:r>
-              <a:rPr lang="en-US" sz="1600" dirty="0"/>
+              <a:rPr lang="en-US" sz="1600" b="1" dirty="0" err="1"/>
+              <a:t>Kvalifikacije</a:t>
+            </a:r>
+            <a:r>
+              <a:rPr lang="en-US" sz="1600" b="1" dirty="0"/>
+              <a:t>, </a:t>
+            </a:r>
+            <a:r>
+              <a:rPr lang="en-US" sz="1600" b="1" dirty="0" err="1"/>
+              <a:t>ravnine</a:t>
+            </a:r>
+            <a:r>
+              <a:rPr lang="en-US" sz="1600" b="1" dirty="0"/>
+              <a:t> in </a:t>
+            </a:r>
+            <a:r>
+              <a:rPr lang="en-US" sz="1600" b="1" dirty="0" err="1"/>
+              <a:t>ovinki</a:t>
+            </a:r>
+            <a:endParaRPr lang="sl-SI" sz="1600" b="1" dirty="0"/>
+          </a:p>
+          <a:p>
+            <a:pPr marL="0" indent="0">
+              <a:buNone/>
+            </a:pPr>
+            <a:r>
+              <a:rPr lang="sl-SI" sz="1600" b="1" dirty="0"/>
+              <a:t> Cilj</a:t>
+            </a:r>
+          </a:p>
+          <a:p>
+            <a:pPr marL="0" indent="0">
+              <a:buNone/>
+            </a:pPr>
+            <a:r>
+              <a:rPr lang="sl-SI" sz="1600" dirty="0"/>
+              <a:t>  - povezava med štartnim položajem in končno uvrstitvijo</a:t>
+            </a:r>
+          </a:p>
+          <a:p>
+            <a:pPr marL="0" indent="0">
+              <a:buNone/>
+            </a:pPr>
+            <a:r>
+              <a:rPr lang="sl-SI" sz="1600" dirty="0"/>
+              <a:t>  - primerjava hitrosti na ravninah in učinkovitosti v ovinkih</a:t>
+            </a:r>
+          </a:p>
+          <a:p>
+            <a:pPr marL="0" indent="0">
+              <a:buNone/>
+            </a:pPr>
+            <a:endParaRPr lang="sl-SI" sz="1600" dirty="0"/>
+          </a:p>
+          <a:p>
+            <a:pPr marL="0" indent="0">
+              <a:buNone/>
+            </a:pPr>
+            <a:r>
+              <a:rPr lang="sl-SI" sz="1600" dirty="0"/>
+              <a:t>  </a:t>
+            </a:r>
+            <a:r>
+              <a:rPr lang="sl-SI" sz="1600" b="1" dirty="0"/>
+              <a:t>Metoda</a:t>
+            </a:r>
+          </a:p>
+          <a:p>
+            <a:pPr marL="0" indent="0">
+              <a:buNone/>
+            </a:pPr>
+            <a:r>
+              <a:rPr lang="sl-SI" sz="1600" dirty="0"/>
+              <a:t>  - FastF1 podatki za sezono 2025</a:t>
+            </a:r>
+          </a:p>
+          <a:p>
+            <a:pPr marL="0" indent="0">
+              <a:buNone/>
+            </a:pPr>
+            <a:r>
+              <a:rPr lang="sl-SI" sz="1600" dirty="0"/>
+              <a:t>  - Spearmanova/Pearsonova korelacija</a:t>
+            </a:r>
+          </a:p>
+          <a:p>
+            <a:pPr marL="0" indent="0">
+              <a:buNone/>
+            </a:pPr>
+            <a:r>
+              <a:rPr lang="sl-SI" sz="1600" dirty="0"/>
+              <a:t>  - SpeedST za ravnine, telemetrija za hitrosti v ovinkih</a:t>
+            </a:r>
+          </a:p>
+          <a:p>
+            <a:pPr marL="0" indent="0">
+              <a:buNone/>
+            </a:pPr>
+            <a:endParaRPr lang="sl-SI" sz="1600" dirty="0"/>
+          </a:p>
+          <a:p>
+            <a:pPr marL="0" indent="0">
+              <a:buNone/>
+            </a:pPr>
+            <a:r>
+              <a:rPr lang="sl-SI" sz="1600" dirty="0"/>
               <a:t> </a:t>
             </a:r>
             <a:r>
-              <a:rPr lang="en-US" sz="1600" dirty="0" err="1"/>
-              <a:t>dosegli</a:t>
-            </a:r>
-            <a:r>
-              <a:rPr lang="en-US" sz="1600" dirty="0"/>
-              <a:t> </a:t>
-            </a:r>
-            <a:r>
-              <a:rPr lang="en-US" sz="1600" dirty="0" err="1"/>
-              <a:t>cilj</a:t>
-            </a:r>
-            <a:r>
-              <a:rPr lang="en-US" sz="1600" dirty="0"/>
-              <a:t> 1 </a:t>
-            </a:r>
-            <a:r>
-              <a:rPr lang="en-US" sz="1600" dirty="0" err="1"/>
-              <a:t>oziroma</a:t>
-            </a:r>
-            <a:r>
-              <a:rPr lang="en-US" sz="1600" dirty="0"/>
-              <a:t> </a:t>
-            </a:r>
-            <a:r>
-              <a:rPr lang="en-US" sz="1600" dirty="0" err="1"/>
-              <a:t>odgovorili</a:t>
-            </a:r>
-            <a:r>
-              <a:rPr lang="en-US" sz="1600" dirty="0"/>
-              <a:t> </a:t>
-            </a:r>
-            <a:r>
-              <a:rPr lang="en-US" sz="1600" dirty="0" err="1"/>
-              <a:t>na</a:t>
-            </a:r>
-            <a:r>
-              <a:rPr lang="en-US" sz="1600" dirty="0"/>
-              <a:t> </a:t>
-            </a:r>
-            <a:r>
-              <a:rPr lang="en-US" sz="1600" dirty="0" err="1"/>
-              <a:t>vprašanje</a:t>
-            </a:r>
-            <a:r>
-              <a:rPr lang="en-US" sz="1600" dirty="0"/>
-              <a:t> 1…</a:t>
+              <a:rPr lang="sl-SI" sz="1600" b="1" dirty="0"/>
+              <a:t> Rezultati</a:t>
+            </a:r>
+          </a:p>
+          <a:p>
+            <a:pPr marL="0" indent="0">
+              <a:buNone/>
+            </a:pPr>
+            <a:r>
+              <a:rPr lang="sl-SI" sz="1600" dirty="0"/>
+              <a:t>  </a:t>
+            </a:r>
+            <a:r>
+              <a:rPr lang="el-GR" sz="1600" dirty="0"/>
+              <a:t>- </a:t>
+            </a:r>
+            <a:r>
+              <a:rPr lang="sl-SI" sz="1600" dirty="0"/>
+              <a:t>sezonsko povprečje povezave kvalifikacije → </a:t>
+            </a:r>
+            <a:r>
+              <a:rPr lang="el-GR" sz="1600" dirty="0"/>
+              <a:t>ρ ≈ 0.65</a:t>
+            </a:r>
+          </a:p>
+          <a:p>
+            <a:pPr marL="0" indent="0">
+              <a:buNone/>
+            </a:pPr>
+            <a:r>
+              <a:rPr lang="el-GR" sz="1600" dirty="0"/>
+              <a:t>  - </a:t>
+            </a:r>
+            <a:r>
+              <a:rPr lang="sl-SI" sz="1600" dirty="0"/>
+              <a:t>ovinki so bili močnejši signal za rezultat na 20 od 24 dirk</a:t>
             </a:r>
           </a:p>
         </p:txBody>
@@ -5602,7 +5690,7 @@
         </p:spPr>
         <p:txBody>
           <a:bodyPr>
-            <a:normAutofit/>
+            <a:normAutofit fontScale="92500" lnSpcReduction="20000"/>
           </a:bodyPr>
           <a:lstStyle/>
           <a:p>
@@ -6385,6 +6473,1017 @@
           </a:p>
         </p:txBody>
       </p:sp>
+      <p:pic>
+        <p:nvPicPr>
+          <p:cNvPr id="6" name="Picture 5">
+            <a:extLst>
+              <a:ext uri="{FF2B5EF4-FFF2-40B4-BE49-F238E27FC236}">
+                <a16:creationId xmlns:a16="http://schemas.microsoft.com/office/drawing/2014/main" id="{3C274FA9-F36E-8929-8502-000590875C08}"/>
+              </a:ext>
+            </a:extLst>
+          </p:cNvPr>
+          <p:cNvPicPr>
+            <a:picLocks noChangeAspect="1"/>
+          </p:cNvPicPr>
+          <p:nvPr/>
+        </p:nvPicPr>
+        <p:blipFill>
+          <a:blip r:embed="rId2"/>
+          <a:stretch>
+            <a:fillRect/>
+          </a:stretch>
+        </p:blipFill>
+        <p:spPr>
+          <a:xfrm>
+            <a:off x="5087738" y="454816"/>
+            <a:ext cx="3260761" cy="2247476"/>
+          </a:xfrm>
+          <a:prstGeom prst="rect">
+            <a:avLst/>
+          </a:prstGeom>
+        </p:spPr>
+      </p:pic>
+      <p:pic>
+        <p:nvPicPr>
+          <p:cNvPr id="10" name="Picture 9">
+            <a:extLst>
+              <a:ext uri="{FF2B5EF4-FFF2-40B4-BE49-F238E27FC236}">
+                <a16:creationId xmlns:a16="http://schemas.microsoft.com/office/drawing/2014/main" id="{8FB58BB6-D3AE-322E-B5DE-1AFDED65CDC0}"/>
+              </a:ext>
+            </a:extLst>
+          </p:cNvPr>
+          <p:cNvPicPr>
+            <a:picLocks noChangeAspect="1"/>
+          </p:cNvPicPr>
+          <p:nvPr/>
+        </p:nvPicPr>
+        <p:blipFill>
+          <a:blip r:embed="rId3"/>
+          <a:stretch>
+            <a:fillRect/>
+          </a:stretch>
+        </p:blipFill>
+        <p:spPr>
+          <a:xfrm>
+            <a:off x="4893590" y="2702292"/>
+            <a:ext cx="3476594" cy="2384307"/>
+          </a:xfrm>
+          <a:prstGeom prst="rect">
+            <a:avLst/>
+          </a:prstGeom>
+        </p:spPr>
+      </p:pic>
+    </p:spTree>
+    <p:extLst>
+      <p:ext uri="{BB962C8B-B14F-4D97-AF65-F5344CB8AC3E}">
+        <p14:creationId xmlns:p14="http://schemas.microsoft.com/office/powerpoint/2010/main" val="3158927866"/>
+      </p:ext>
+    </p:extLst>
+  </p:cSld>
+  <p:clrMapOvr>
+    <a:masterClrMapping/>
+  </p:clrMapOvr>
+</p:sld>
+</file>
+
+<file path=ppt/slides/slide4.xml><?xml version="1.0" encoding="utf-8"?>
+<p:sld xmlns:a="http://schemas.openxmlformats.org/drawingml/2006/main" xmlns:r="http://schemas.openxmlformats.org/officeDocument/2006/relationships" xmlns:p="http://schemas.openxmlformats.org/presentationml/2006/main">
+  <p:cSld>
+    <p:spTree>
+      <p:nvGrpSpPr>
+        <p:cNvPr id="1" name="">
+          <a:extLst>
+            <a:ext uri="{FF2B5EF4-FFF2-40B4-BE49-F238E27FC236}">
+              <a16:creationId xmlns:a16="http://schemas.microsoft.com/office/drawing/2014/main" id="{DF62F0B2-72EB-38BF-039C-5D72B9B58840}"/>
+            </a:ext>
+          </a:extLst>
+        </p:cNvPr>
+        <p:cNvGrpSpPr/>
+        <p:nvPr/>
+      </p:nvGrpSpPr>
+      <p:grpSpPr>
+        <a:xfrm>
+          <a:off x="0" y="0"/>
+          <a:ext cx="0" cy="0"/>
+          <a:chOff x="0" y="0"/>
+          <a:chExt cx="0" cy="0"/>
+        </a:xfrm>
+      </p:grpSpPr>
+      <p:sp>
+        <p:nvSpPr>
+          <p:cNvPr id="3" name="Content Placeholder 2">
+            <a:extLst>
+              <a:ext uri="{FF2B5EF4-FFF2-40B4-BE49-F238E27FC236}">
+                <a16:creationId xmlns:a16="http://schemas.microsoft.com/office/drawing/2014/main" id="{5FB437B7-043C-2621-A5E7-3E13209867D0}"/>
+              </a:ext>
+            </a:extLst>
+          </p:cNvPr>
+          <p:cNvSpPr>
+            <a:spLocks noGrp="1"/>
+          </p:cNvSpPr>
+          <p:nvPr>
+            <p:ph sz="half" idx="1"/>
+          </p:nvPr>
+        </p:nvSpPr>
+        <p:spPr>
+          <a:xfrm>
+            <a:off x="92765" y="589356"/>
+            <a:ext cx="4403432" cy="4177907"/>
+          </a:xfrm>
+          <a:ln>
+            <a:solidFill>
+              <a:schemeClr val="tx1"/>
+            </a:solidFill>
+          </a:ln>
+        </p:spPr>
+        <p:txBody>
+          <a:bodyPr>
+            <a:normAutofit/>
+          </a:bodyPr>
+          <a:lstStyle/>
+          <a:p>
+            <a:pPr marL="0" indent="0">
+              <a:buNone/>
+            </a:pPr>
+            <a:r>
+              <a:rPr lang="en-US" sz="1600" dirty="0" err="1"/>
+              <a:t>Kako</a:t>
+            </a:r>
+            <a:r>
+              <a:rPr lang="en-US" sz="1600" dirty="0"/>
+              <a:t> </a:t>
+            </a:r>
+            <a:r>
+              <a:rPr lang="en-US" sz="1600" dirty="0" err="1"/>
+              <a:t>boste</a:t>
+            </a:r>
+            <a:r>
+              <a:rPr lang="en-US" sz="1600" dirty="0"/>
+              <a:t> </a:t>
+            </a:r>
+            <a:r>
+              <a:rPr lang="en-US" sz="1600" dirty="0" err="1"/>
+              <a:t>dosegli</a:t>
+            </a:r>
+            <a:r>
+              <a:rPr lang="en-US" sz="1600" dirty="0"/>
+              <a:t> </a:t>
+            </a:r>
+            <a:r>
+              <a:rPr lang="en-US" sz="1600" dirty="0" err="1"/>
+              <a:t>cilj</a:t>
+            </a:r>
+            <a:r>
+              <a:rPr lang="en-US" sz="1600" dirty="0"/>
+              <a:t> 1 </a:t>
+            </a:r>
+            <a:r>
+              <a:rPr lang="en-US" sz="1600" dirty="0" err="1"/>
+              <a:t>oziroma</a:t>
+            </a:r>
+            <a:r>
+              <a:rPr lang="en-US" sz="1600" dirty="0"/>
+              <a:t> </a:t>
+            </a:r>
+            <a:r>
+              <a:rPr lang="en-US" sz="1600" dirty="0" err="1"/>
+              <a:t>odgovorili</a:t>
+            </a:r>
+            <a:r>
+              <a:rPr lang="en-US" sz="1600" dirty="0"/>
+              <a:t> </a:t>
+            </a:r>
+            <a:r>
+              <a:rPr lang="en-US" sz="1600" dirty="0" err="1"/>
+              <a:t>na</a:t>
+            </a:r>
+            <a:r>
+              <a:rPr lang="en-US" sz="1600" dirty="0"/>
+              <a:t> </a:t>
+            </a:r>
+            <a:r>
+              <a:rPr lang="en-US" sz="1600" dirty="0" err="1"/>
+              <a:t>vprašanje</a:t>
+            </a:r>
+            <a:r>
+              <a:rPr lang="en-US" sz="1600" dirty="0"/>
+              <a:t> 1…</a:t>
+            </a:r>
+          </a:p>
+        </p:txBody>
+      </p:sp>
+      <p:sp>
+        <p:nvSpPr>
+          <p:cNvPr id="18" name="Content Placeholder 17">
+            <a:extLst>
+              <a:ext uri="{FF2B5EF4-FFF2-40B4-BE49-F238E27FC236}">
+                <a16:creationId xmlns:a16="http://schemas.microsoft.com/office/drawing/2014/main" id="{337F0647-CF79-64A1-B84F-1434B0EDDB4A}"/>
+              </a:ext>
+            </a:extLst>
+          </p:cNvPr>
+          <p:cNvSpPr>
+            <a:spLocks noGrp="1"/>
+          </p:cNvSpPr>
+          <p:nvPr>
+            <p:ph sz="half" idx="2"/>
+          </p:nvPr>
+        </p:nvSpPr>
+        <p:spPr>
+          <a:xfrm>
+            <a:off x="4588962" y="589356"/>
+            <a:ext cx="4462272" cy="4177907"/>
+          </a:xfrm>
+          <a:ln>
+            <a:solidFill>
+              <a:schemeClr val="tx1"/>
+            </a:solidFill>
+          </a:ln>
+        </p:spPr>
+        <p:txBody>
+          <a:bodyPr>
+            <a:normAutofit/>
+          </a:bodyPr>
+          <a:lstStyle/>
+          <a:p>
+            <a:endParaRPr lang="en-US" sz="1600" dirty="0"/>
+          </a:p>
+        </p:txBody>
+      </p:sp>
+      <p:sp>
+        <p:nvSpPr>
+          <p:cNvPr id="7" name="Slide Number Placeholder 6">
+            <a:extLst>
+              <a:ext uri="{FF2B5EF4-FFF2-40B4-BE49-F238E27FC236}">
+                <a16:creationId xmlns:a16="http://schemas.microsoft.com/office/drawing/2014/main" id="{C417B11F-DEF4-EA91-A9D6-E2806AB16C98}"/>
+              </a:ext>
+            </a:extLst>
+          </p:cNvPr>
+          <p:cNvSpPr>
+            <a:spLocks noGrp="1"/>
+          </p:cNvSpPr>
+          <p:nvPr>
+            <p:ph type="sldNum" sz="quarter" idx="12"/>
+          </p:nvPr>
+        </p:nvSpPr>
+        <p:spPr/>
+        <p:txBody>
+          <a:bodyPr/>
+          <a:lstStyle/>
+          <a:p>
+            <a:fld id="{03BC8BC1-971C-5C4D-898D-87CE7EF1EB36}" type="slidenum">
+              <a:rPr lang="en-US" smtClean="0"/>
+              <a:t>4</a:t>
+            </a:fld>
+            <a:endParaRPr lang="en-US"/>
+          </a:p>
+        </p:txBody>
+      </p:sp>
+      <p:sp>
+        <p:nvSpPr>
+          <p:cNvPr id="8" name="Content Placeholder 2">
+            <a:extLst>
+              <a:ext uri="{FF2B5EF4-FFF2-40B4-BE49-F238E27FC236}">
+                <a16:creationId xmlns:a16="http://schemas.microsoft.com/office/drawing/2014/main" id="{CA208B6A-C03A-2C7F-2682-8EA7A573890E}"/>
+              </a:ext>
+            </a:extLst>
+          </p:cNvPr>
+          <p:cNvSpPr txBox="1">
+            <a:spLocks/>
+          </p:cNvSpPr>
+          <p:nvPr/>
+        </p:nvSpPr>
+        <p:spPr>
+          <a:xfrm>
+            <a:off x="92765" y="82696"/>
+            <a:ext cx="4403432" cy="372120"/>
+          </a:xfrm>
+          <a:prstGeom prst="rect">
+            <a:avLst/>
+          </a:prstGeom>
+          <a:ln>
+            <a:noFill/>
+          </a:ln>
+        </p:spPr>
+        <p:txBody>
+          <a:bodyPr vert="horz" lIns="91440" tIns="45720" rIns="91440" bIns="45720" rtlCol="0">
+            <a:normAutofit/>
+          </a:bodyPr>
+          <a:lstStyle>
+            <a:lvl1pPr marL="171450" indent="-171450" algn="l" defTabSz="685800" rtl="0" eaLnBrk="1" latinLnBrk="0" hangingPunct="1">
+              <a:lnSpc>
+                <a:spcPct val="90000"/>
+              </a:lnSpc>
+              <a:spcBef>
+                <a:spcPts val="750"/>
+              </a:spcBef>
+              <a:buFont typeface="Arial" panose="020B0604020202020204" pitchFamily="34" charset="0"/>
+              <a:buChar char="•"/>
+              <a:defRPr sz="2100" kern="1200">
+                <a:solidFill>
+                  <a:schemeClr val="tx1"/>
+                </a:solidFill>
+                <a:latin typeface="+mn-lt"/>
+                <a:ea typeface="+mn-ea"/>
+                <a:cs typeface="+mn-cs"/>
+              </a:defRPr>
+            </a:lvl1pPr>
+            <a:lvl2pPr marL="514350" indent="-171450" algn="l" defTabSz="685800" rtl="0" eaLnBrk="1" latinLnBrk="0" hangingPunct="1">
+              <a:lnSpc>
+                <a:spcPct val="90000"/>
+              </a:lnSpc>
+              <a:spcBef>
+                <a:spcPts val="375"/>
+              </a:spcBef>
+              <a:buFont typeface="Arial" panose="020B0604020202020204" pitchFamily="34" charset="0"/>
+              <a:buChar char="•"/>
+              <a:defRPr sz="1800" kern="1200">
+                <a:solidFill>
+                  <a:schemeClr val="tx1"/>
+                </a:solidFill>
+                <a:latin typeface="+mn-lt"/>
+                <a:ea typeface="+mn-ea"/>
+                <a:cs typeface="+mn-cs"/>
+              </a:defRPr>
+            </a:lvl2pPr>
+            <a:lvl3pPr marL="857250" indent="-171450" algn="l" defTabSz="685800" rtl="0" eaLnBrk="1" latinLnBrk="0" hangingPunct="1">
+              <a:lnSpc>
+                <a:spcPct val="90000"/>
+              </a:lnSpc>
+              <a:spcBef>
+                <a:spcPts val="375"/>
+              </a:spcBef>
+              <a:buFont typeface="Arial" panose="020B0604020202020204" pitchFamily="34" charset="0"/>
+              <a:buChar char="•"/>
+              <a:defRPr sz="1500" kern="1200">
+                <a:solidFill>
+                  <a:schemeClr val="tx1"/>
+                </a:solidFill>
+                <a:latin typeface="+mn-lt"/>
+                <a:ea typeface="+mn-ea"/>
+                <a:cs typeface="+mn-cs"/>
+              </a:defRPr>
+            </a:lvl3pPr>
+            <a:lvl4pPr marL="1200150" indent="-171450" algn="l" defTabSz="685800" rtl="0" eaLnBrk="1" latinLnBrk="0" hangingPunct="1">
+              <a:lnSpc>
+                <a:spcPct val="90000"/>
+              </a:lnSpc>
+              <a:spcBef>
+                <a:spcPts val="375"/>
+              </a:spcBef>
+              <a:buFont typeface="Arial" panose="020B0604020202020204" pitchFamily="34" charset="0"/>
+              <a:buChar char="•"/>
+              <a:defRPr sz="1350" kern="1200">
+                <a:solidFill>
+                  <a:schemeClr val="tx1"/>
+                </a:solidFill>
+                <a:latin typeface="+mn-lt"/>
+                <a:ea typeface="+mn-ea"/>
+                <a:cs typeface="+mn-cs"/>
+              </a:defRPr>
+            </a:lvl4pPr>
+            <a:lvl5pPr marL="1543050" indent="-171450" algn="l" defTabSz="685800" rtl="0" eaLnBrk="1" latinLnBrk="0" hangingPunct="1">
+              <a:lnSpc>
+                <a:spcPct val="90000"/>
+              </a:lnSpc>
+              <a:spcBef>
+                <a:spcPts val="375"/>
+              </a:spcBef>
+              <a:buFont typeface="Arial" panose="020B0604020202020204" pitchFamily="34" charset="0"/>
+              <a:buChar char="•"/>
+              <a:defRPr sz="1350" kern="1200">
+                <a:solidFill>
+                  <a:schemeClr val="tx1"/>
+                </a:solidFill>
+                <a:latin typeface="+mn-lt"/>
+                <a:ea typeface="+mn-ea"/>
+                <a:cs typeface="+mn-cs"/>
+              </a:defRPr>
+            </a:lvl5pPr>
+            <a:lvl6pPr marL="1885950" indent="-171450" algn="l" defTabSz="685800" rtl="0" eaLnBrk="1" latinLnBrk="0" hangingPunct="1">
+              <a:lnSpc>
+                <a:spcPct val="90000"/>
+              </a:lnSpc>
+              <a:spcBef>
+                <a:spcPts val="375"/>
+              </a:spcBef>
+              <a:buFont typeface="Arial" panose="020B0604020202020204" pitchFamily="34" charset="0"/>
+              <a:buChar char="•"/>
+              <a:defRPr sz="1350" kern="1200">
+                <a:solidFill>
+                  <a:schemeClr val="tx1"/>
+                </a:solidFill>
+                <a:latin typeface="+mn-lt"/>
+                <a:ea typeface="+mn-ea"/>
+                <a:cs typeface="+mn-cs"/>
+              </a:defRPr>
+            </a:lvl6pPr>
+            <a:lvl7pPr marL="2228850" indent="-171450" algn="l" defTabSz="685800" rtl="0" eaLnBrk="1" latinLnBrk="0" hangingPunct="1">
+              <a:lnSpc>
+                <a:spcPct val="90000"/>
+              </a:lnSpc>
+              <a:spcBef>
+                <a:spcPts val="375"/>
+              </a:spcBef>
+              <a:buFont typeface="Arial" panose="020B0604020202020204" pitchFamily="34" charset="0"/>
+              <a:buChar char="•"/>
+              <a:defRPr sz="1350" kern="1200">
+                <a:solidFill>
+                  <a:schemeClr val="tx1"/>
+                </a:solidFill>
+                <a:latin typeface="+mn-lt"/>
+                <a:ea typeface="+mn-ea"/>
+                <a:cs typeface="+mn-cs"/>
+              </a:defRPr>
+            </a:lvl7pPr>
+            <a:lvl8pPr marL="2571750" indent="-171450" algn="l" defTabSz="685800" rtl="0" eaLnBrk="1" latinLnBrk="0" hangingPunct="1">
+              <a:lnSpc>
+                <a:spcPct val="90000"/>
+              </a:lnSpc>
+              <a:spcBef>
+                <a:spcPts val="375"/>
+              </a:spcBef>
+              <a:buFont typeface="Arial" panose="020B0604020202020204" pitchFamily="34" charset="0"/>
+              <a:buChar char="•"/>
+              <a:defRPr sz="1350" kern="1200">
+                <a:solidFill>
+                  <a:schemeClr val="tx1"/>
+                </a:solidFill>
+                <a:latin typeface="+mn-lt"/>
+                <a:ea typeface="+mn-ea"/>
+                <a:cs typeface="+mn-cs"/>
+              </a:defRPr>
+            </a:lvl8pPr>
+            <a:lvl9pPr marL="2914650" indent="-171450" algn="l" defTabSz="685800" rtl="0" eaLnBrk="1" latinLnBrk="0" hangingPunct="1">
+              <a:lnSpc>
+                <a:spcPct val="90000"/>
+              </a:lnSpc>
+              <a:spcBef>
+                <a:spcPts val="375"/>
+              </a:spcBef>
+              <a:buFont typeface="Arial" panose="020B0604020202020204" pitchFamily="34" charset="0"/>
+              <a:buChar char="•"/>
+              <a:defRPr sz="1350" kern="1200">
+                <a:solidFill>
+                  <a:schemeClr val="tx1"/>
+                </a:solidFill>
+                <a:latin typeface="+mn-lt"/>
+                <a:ea typeface="+mn-ea"/>
+                <a:cs typeface="+mn-cs"/>
+              </a:defRPr>
+            </a:lvl9pPr>
+          </a:lstStyle>
+          <a:p>
+            <a:pPr marL="0" indent="0">
+              <a:buNone/>
+            </a:pPr>
+            <a:r>
+              <a:rPr lang="en-US" sz="1600" b="1" dirty="0" err="1"/>
+              <a:t>Podroben</a:t>
+            </a:r>
+            <a:r>
+              <a:rPr lang="en-US" sz="1600" b="1" dirty="0"/>
+              <a:t> </a:t>
+            </a:r>
+            <a:r>
+              <a:rPr lang="en-US" sz="1600" b="1" dirty="0" err="1"/>
+              <a:t>opis</a:t>
+            </a:r>
+            <a:r>
+              <a:rPr lang="en-US" sz="1600" b="1" dirty="0"/>
+              <a:t> </a:t>
+            </a:r>
+            <a:r>
+              <a:rPr lang="en-US" sz="1600" b="1" dirty="0" err="1"/>
+              <a:t>ciljev</a:t>
+            </a:r>
+            <a:r>
+              <a:rPr lang="en-US" sz="1600" b="1" dirty="0"/>
+              <a:t> in </a:t>
+            </a:r>
+            <a:r>
+              <a:rPr lang="en-US" sz="1600" b="1" dirty="0" err="1"/>
+              <a:t>metod</a:t>
+            </a:r>
+            <a:endParaRPr lang="en-US" sz="1600" b="1" dirty="0"/>
+          </a:p>
+        </p:txBody>
+      </p:sp>
+      <p:sp>
+        <p:nvSpPr>
+          <p:cNvPr id="11" name="Content Placeholder 11">
+            <a:extLst>
+              <a:ext uri="{FF2B5EF4-FFF2-40B4-BE49-F238E27FC236}">
+                <a16:creationId xmlns:a16="http://schemas.microsoft.com/office/drawing/2014/main" id="{CCC2915C-9DF9-738A-0A3A-6A5B50229095}"/>
+              </a:ext>
+            </a:extLst>
+          </p:cNvPr>
+          <p:cNvSpPr txBox="1">
+            <a:spLocks/>
+          </p:cNvSpPr>
+          <p:nvPr/>
+        </p:nvSpPr>
+        <p:spPr>
+          <a:xfrm>
+            <a:off x="4572000" y="720327"/>
+            <a:ext cx="4436828" cy="3040640"/>
+          </a:xfrm>
+          <a:prstGeom prst="rect">
+            <a:avLst/>
+          </a:prstGeom>
+        </p:spPr>
+        <p:txBody>
+          <a:bodyPr/>
+          <a:lstStyle>
+            <a:lvl1pPr marL="171450" indent="-171450" algn="l" defTabSz="685800" rtl="0" eaLnBrk="1" latinLnBrk="0" hangingPunct="1">
+              <a:lnSpc>
+                <a:spcPct val="90000"/>
+              </a:lnSpc>
+              <a:spcBef>
+                <a:spcPts val="750"/>
+              </a:spcBef>
+              <a:buFont typeface="Arial" panose="020B0604020202020204" pitchFamily="34" charset="0"/>
+              <a:buChar char="•"/>
+              <a:defRPr sz="2100" kern="1200">
+                <a:solidFill>
+                  <a:schemeClr val="tx1"/>
+                </a:solidFill>
+                <a:latin typeface="+mn-lt"/>
+                <a:ea typeface="+mn-ea"/>
+                <a:cs typeface="+mn-cs"/>
+              </a:defRPr>
+            </a:lvl1pPr>
+            <a:lvl2pPr marL="514350" indent="-171450" algn="l" defTabSz="685800" rtl="0" eaLnBrk="1" latinLnBrk="0" hangingPunct="1">
+              <a:lnSpc>
+                <a:spcPct val="90000"/>
+              </a:lnSpc>
+              <a:spcBef>
+                <a:spcPts val="375"/>
+              </a:spcBef>
+              <a:buFont typeface="Arial" panose="020B0604020202020204" pitchFamily="34" charset="0"/>
+              <a:buChar char="•"/>
+              <a:defRPr sz="1800" kern="1200">
+                <a:solidFill>
+                  <a:schemeClr val="tx1"/>
+                </a:solidFill>
+                <a:latin typeface="+mn-lt"/>
+                <a:ea typeface="+mn-ea"/>
+                <a:cs typeface="+mn-cs"/>
+              </a:defRPr>
+            </a:lvl2pPr>
+            <a:lvl3pPr marL="857250" indent="-171450" algn="l" defTabSz="685800" rtl="0" eaLnBrk="1" latinLnBrk="0" hangingPunct="1">
+              <a:lnSpc>
+                <a:spcPct val="90000"/>
+              </a:lnSpc>
+              <a:spcBef>
+                <a:spcPts val="375"/>
+              </a:spcBef>
+              <a:buFont typeface="Arial" panose="020B0604020202020204" pitchFamily="34" charset="0"/>
+              <a:buChar char="•"/>
+              <a:defRPr sz="1500" kern="1200">
+                <a:solidFill>
+                  <a:schemeClr val="tx1"/>
+                </a:solidFill>
+                <a:latin typeface="+mn-lt"/>
+                <a:ea typeface="+mn-ea"/>
+                <a:cs typeface="+mn-cs"/>
+              </a:defRPr>
+            </a:lvl3pPr>
+            <a:lvl4pPr marL="1200150" indent="-171450" algn="l" defTabSz="685800" rtl="0" eaLnBrk="1" latinLnBrk="0" hangingPunct="1">
+              <a:lnSpc>
+                <a:spcPct val="90000"/>
+              </a:lnSpc>
+              <a:spcBef>
+                <a:spcPts val="375"/>
+              </a:spcBef>
+              <a:buFont typeface="Arial" panose="020B0604020202020204" pitchFamily="34" charset="0"/>
+              <a:buChar char="•"/>
+              <a:defRPr sz="1350" kern="1200">
+                <a:solidFill>
+                  <a:schemeClr val="tx1"/>
+                </a:solidFill>
+                <a:latin typeface="+mn-lt"/>
+                <a:ea typeface="+mn-ea"/>
+                <a:cs typeface="+mn-cs"/>
+              </a:defRPr>
+            </a:lvl4pPr>
+            <a:lvl5pPr marL="1543050" indent="-171450" algn="l" defTabSz="685800" rtl="0" eaLnBrk="1" latinLnBrk="0" hangingPunct="1">
+              <a:lnSpc>
+                <a:spcPct val="90000"/>
+              </a:lnSpc>
+              <a:spcBef>
+                <a:spcPts val="375"/>
+              </a:spcBef>
+              <a:buFont typeface="Arial" panose="020B0604020202020204" pitchFamily="34" charset="0"/>
+              <a:buChar char="•"/>
+              <a:defRPr sz="1350" kern="1200">
+                <a:solidFill>
+                  <a:schemeClr val="tx1"/>
+                </a:solidFill>
+                <a:latin typeface="+mn-lt"/>
+                <a:ea typeface="+mn-ea"/>
+                <a:cs typeface="+mn-cs"/>
+              </a:defRPr>
+            </a:lvl5pPr>
+            <a:lvl6pPr marL="1885950" indent="-171450" algn="l" defTabSz="685800" rtl="0" eaLnBrk="1" latinLnBrk="0" hangingPunct="1">
+              <a:lnSpc>
+                <a:spcPct val="90000"/>
+              </a:lnSpc>
+              <a:spcBef>
+                <a:spcPts val="375"/>
+              </a:spcBef>
+              <a:buFont typeface="Arial" panose="020B0604020202020204" pitchFamily="34" charset="0"/>
+              <a:buChar char="•"/>
+              <a:defRPr sz="1350" kern="1200">
+                <a:solidFill>
+                  <a:schemeClr val="tx1"/>
+                </a:solidFill>
+                <a:latin typeface="+mn-lt"/>
+                <a:ea typeface="+mn-ea"/>
+                <a:cs typeface="+mn-cs"/>
+              </a:defRPr>
+            </a:lvl6pPr>
+            <a:lvl7pPr marL="2228850" indent="-171450" algn="l" defTabSz="685800" rtl="0" eaLnBrk="1" latinLnBrk="0" hangingPunct="1">
+              <a:lnSpc>
+                <a:spcPct val="90000"/>
+              </a:lnSpc>
+              <a:spcBef>
+                <a:spcPts val="375"/>
+              </a:spcBef>
+              <a:buFont typeface="Arial" panose="020B0604020202020204" pitchFamily="34" charset="0"/>
+              <a:buChar char="•"/>
+              <a:defRPr sz="1350" kern="1200">
+                <a:solidFill>
+                  <a:schemeClr val="tx1"/>
+                </a:solidFill>
+                <a:latin typeface="+mn-lt"/>
+                <a:ea typeface="+mn-ea"/>
+                <a:cs typeface="+mn-cs"/>
+              </a:defRPr>
+            </a:lvl7pPr>
+            <a:lvl8pPr marL="2571750" indent="-171450" algn="l" defTabSz="685800" rtl="0" eaLnBrk="1" latinLnBrk="0" hangingPunct="1">
+              <a:lnSpc>
+                <a:spcPct val="90000"/>
+              </a:lnSpc>
+              <a:spcBef>
+                <a:spcPts val="375"/>
+              </a:spcBef>
+              <a:buFont typeface="Arial" panose="020B0604020202020204" pitchFamily="34" charset="0"/>
+              <a:buChar char="•"/>
+              <a:defRPr sz="1350" kern="1200">
+                <a:solidFill>
+                  <a:schemeClr val="tx1"/>
+                </a:solidFill>
+                <a:latin typeface="+mn-lt"/>
+                <a:ea typeface="+mn-ea"/>
+                <a:cs typeface="+mn-cs"/>
+              </a:defRPr>
+            </a:lvl8pPr>
+            <a:lvl9pPr marL="2914650" indent="-171450" algn="l" defTabSz="685800" rtl="0" eaLnBrk="1" latinLnBrk="0" hangingPunct="1">
+              <a:lnSpc>
+                <a:spcPct val="90000"/>
+              </a:lnSpc>
+              <a:spcBef>
+                <a:spcPts val="375"/>
+              </a:spcBef>
+              <a:buFont typeface="Arial" panose="020B0604020202020204" pitchFamily="34" charset="0"/>
+              <a:buChar char="•"/>
+              <a:defRPr sz="1350" kern="1200">
+                <a:solidFill>
+                  <a:schemeClr val="tx1"/>
+                </a:solidFill>
+                <a:latin typeface="+mn-lt"/>
+                <a:ea typeface="+mn-ea"/>
+                <a:cs typeface="+mn-cs"/>
+              </a:defRPr>
+            </a:lvl9pPr>
+          </a:lstStyle>
+          <a:p>
+            <a:pPr marL="0" indent="0">
+              <a:buFont typeface="Arial" panose="020B0604020202020204" pitchFamily="34" charset="0"/>
+              <a:buNone/>
+            </a:pPr>
+            <a:endParaRPr lang="en-US" sz="1600" dirty="0"/>
+          </a:p>
+        </p:txBody>
+      </p:sp>
+      <p:sp>
+        <p:nvSpPr>
+          <p:cNvPr id="19" name="Content Placeholder 2">
+            <a:extLst>
+              <a:ext uri="{FF2B5EF4-FFF2-40B4-BE49-F238E27FC236}">
+                <a16:creationId xmlns:a16="http://schemas.microsoft.com/office/drawing/2014/main" id="{A5200CCB-CFA4-1C1C-C760-1DD229BD62FA}"/>
+              </a:ext>
+            </a:extLst>
+          </p:cNvPr>
+          <p:cNvSpPr txBox="1">
+            <a:spLocks/>
+          </p:cNvSpPr>
+          <p:nvPr/>
+        </p:nvSpPr>
+        <p:spPr>
+          <a:xfrm>
+            <a:off x="4588962" y="82696"/>
+            <a:ext cx="4462272" cy="372120"/>
+          </a:xfrm>
+          <a:prstGeom prst="rect">
+            <a:avLst/>
+          </a:prstGeom>
+          <a:ln>
+            <a:noFill/>
+          </a:ln>
+        </p:spPr>
+        <p:txBody>
+          <a:bodyPr vert="horz" lIns="91440" tIns="45720" rIns="91440" bIns="45720" rtlCol="0">
+            <a:normAutofit/>
+          </a:bodyPr>
+          <a:lstStyle>
+            <a:lvl1pPr marL="171450" indent="-171450" algn="l" defTabSz="685800" rtl="0" eaLnBrk="1" latinLnBrk="0" hangingPunct="1">
+              <a:lnSpc>
+                <a:spcPct val="90000"/>
+              </a:lnSpc>
+              <a:spcBef>
+                <a:spcPts val="750"/>
+              </a:spcBef>
+              <a:buFont typeface="Arial" panose="020B0604020202020204" pitchFamily="34" charset="0"/>
+              <a:buChar char="•"/>
+              <a:defRPr sz="2100" kern="1200">
+                <a:solidFill>
+                  <a:schemeClr val="tx1"/>
+                </a:solidFill>
+                <a:latin typeface="+mn-lt"/>
+                <a:ea typeface="+mn-ea"/>
+                <a:cs typeface="+mn-cs"/>
+              </a:defRPr>
+            </a:lvl1pPr>
+            <a:lvl2pPr marL="514350" indent="-171450" algn="l" defTabSz="685800" rtl="0" eaLnBrk="1" latinLnBrk="0" hangingPunct="1">
+              <a:lnSpc>
+                <a:spcPct val="90000"/>
+              </a:lnSpc>
+              <a:spcBef>
+                <a:spcPts val="375"/>
+              </a:spcBef>
+              <a:buFont typeface="Arial" panose="020B0604020202020204" pitchFamily="34" charset="0"/>
+              <a:buChar char="•"/>
+              <a:defRPr sz="1800" kern="1200">
+                <a:solidFill>
+                  <a:schemeClr val="tx1"/>
+                </a:solidFill>
+                <a:latin typeface="+mn-lt"/>
+                <a:ea typeface="+mn-ea"/>
+                <a:cs typeface="+mn-cs"/>
+              </a:defRPr>
+            </a:lvl2pPr>
+            <a:lvl3pPr marL="857250" indent="-171450" algn="l" defTabSz="685800" rtl="0" eaLnBrk="1" latinLnBrk="0" hangingPunct="1">
+              <a:lnSpc>
+                <a:spcPct val="90000"/>
+              </a:lnSpc>
+              <a:spcBef>
+                <a:spcPts val="375"/>
+              </a:spcBef>
+              <a:buFont typeface="Arial" panose="020B0604020202020204" pitchFamily="34" charset="0"/>
+              <a:buChar char="•"/>
+              <a:defRPr sz="1500" kern="1200">
+                <a:solidFill>
+                  <a:schemeClr val="tx1"/>
+                </a:solidFill>
+                <a:latin typeface="+mn-lt"/>
+                <a:ea typeface="+mn-ea"/>
+                <a:cs typeface="+mn-cs"/>
+              </a:defRPr>
+            </a:lvl3pPr>
+            <a:lvl4pPr marL="1200150" indent="-171450" algn="l" defTabSz="685800" rtl="0" eaLnBrk="1" latinLnBrk="0" hangingPunct="1">
+              <a:lnSpc>
+                <a:spcPct val="90000"/>
+              </a:lnSpc>
+              <a:spcBef>
+                <a:spcPts val="375"/>
+              </a:spcBef>
+              <a:buFont typeface="Arial" panose="020B0604020202020204" pitchFamily="34" charset="0"/>
+              <a:buChar char="•"/>
+              <a:defRPr sz="1350" kern="1200">
+                <a:solidFill>
+                  <a:schemeClr val="tx1"/>
+                </a:solidFill>
+                <a:latin typeface="+mn-lt"/>
+                <a:ea typeface="+mn-ea"/>
+                <a:cs typeface="+mn-cs"/>
+              </a:defRPr>
+            </a:lvl4pPr>
+            <a:lvl5pPr marL="1543050" indent="-171450" algn="l" defTabSz="685800" rtl="0" eaLnBrk="1" latinLnBrk="0" hangingPunct="1">
+              <a:lnSpc>
+                <a:spcPct val="90000"/>
+              </a:lnSpc>
+              <a:spcBef>
+                <a:spcPts val="375"/>
+              </a:spcBef>
+              <a:buFont typeface="Arial" panose="020B0604020202020204" pitchFamily="34" charset="0"/>
+              <a:buChar char="•"/>
+              <a:defRPr sz="1350" kern="1200">
+                <a:solidFill>
+                  <a:schemeClr val="tx1"/>
+                </a:solidFill>
+                <a:latin typeface="+mn-lt"/>
+                <a:ea typeface="+mn-ea"/>
+                <a:cs typeface="+mn-cs"/>
+              </a:defRPr>
+            </a:lvl5pPr>
+            <a:lvl6pPr marL="1885950" indent="-171450" algn="l" defTabSz="685800" rtl="0" eaLnBrk="1" latinLnBrk="0" hangingPunct="1">
+              <a:lnSpc>
+                <a:spcPct val="90000"/>
+              </a:lnSpc>
+              <a:spcBef>
+                <a:spcPts val="375"/>
+              </a:spcBef>
+              <a:buFont typeface="Arial" panose="020B0604020202020204" pitchFamily="34" charset="0"/>
+              <a:buChar char="•"/>
+              <a:defRPr sz="1350" kern="1200">
+                <a:solidFill>
+                  <a:schemeClr val="tx1"/>
+                </a:solidFill>
+                <a:latin typeface="+mn-lt"/>
+                <a:ea typeface="+mn-ea"/>
+                <a:cs typeface="+mn-cs"/>
+              </a:defRPr>
+            </a:lvl6pPr>
+            <a:lvl7pPr marL="2228850" indent="-171450" algn="l" defTabSz="685800" rtl="0" eaLnBrk="1" latinLnBrk="0" hangingPunct="1">
+              <a:lnSpc>
+                <a:spcPct val="90000"/>
+              </a:lnSpc>
+              <a:spcBef>
+                <a:spcPts val="375"/>
+              </a:spcBef>
+              <a:buFont typeface="Arial" panose="020B0604020202020204" pitchFamily="34" charset="0"/>
+              <a:buChar char="•"/>
+              <a:defRPr sz="1350" kern="1200">
+                <a:solidFill>
+                  <a:schemeClr val="tx1"/>
+                </a:solidFill>
+                <a:latin typeface="+mn-lt"/>
+                <a:ea typeface="+mn-ea"/>
+                <a:cs typeface="+mn-cs"/>
+              </a:defRPr>
+            </a:lvl7pPr>
+            <a:lvl8pPr marL="2571750" indent="-171450" algn="l" defTabSz="685800" rtl="0" eaLnBrk="1" latinLnBrk="0" hangingPunct="1">
+              <a:lnSpc>
+                <a:spcPct val="90000"/>
+              </a:lnSpc>
+              <a:spcBef>
+                <a:spcPts val="375"/>
+              </a:spcBef>
+              <a:buFont typeface="Arial" panose="020B0604020202020204" pitchFamily="34" charset="0"/>
+              <a:buChar char="•"/>
+              <a:defRPr sz="1350" kern="1200">
+                <a:solidFill>
+                  <a:schemeClr val="tx1"/>
+                </a:solidFill>
+                <a:latin typeface="+mn-lt"/>
+                <a:ea typeface="+mn-ea"/>
+                <a:cs typeface="+mn-cs"/>
+              </a:defRPr>
+            </a:lvl8pPr>
+            <a:lvl9pPr marL="2914650" indent="-171450" algn="l" defTabSz="685800" rtl="0" eaLnBrk="1" latinLnBrk="0" hangingPunct="1">
+              <a:lnSpc>
+                <a:spcPct val="90000"/>
+              </a:lnSpc>
+              <a:spcBef>
+                <a:spcPts val="375"/>
+              </a:spcBef>
+              <a:buFont typeface="Arial" panose="020B0604020202020204" pitchFamily="34" charset="0"/>
+              <a:buChar char="•"/>
+              <a:defRPr sz="1350" kern="1200">
+                <a:solidFill>
+                  <a:schemeClr val="tx1"/>
+                </a:solidFill>
+                <a:latin typeface="+mn-lt"/>
+                <a:ea typeface="+mn-ea"/>
+                <a:cs typeface="+mn-cs"/>
+              </a:defRPr>
+            </a:lvl9pPr>
+          </a:lstStyle>
+          <a:p>
+            <a:pPr marL="0" indent="0">
+              <a:buFont typeface="Arial" panose="020B0604020202020204" pitchFamily="34" charset="0"/>
+              <a:buNone/>
+            </a:pPr>
+            <a:r>
+              <a:rPr lang="en-US" sz="1600" b="1" dirty="0" err="1"/>
+              <a:t>Rezultati</a:t>
+            </a:r>
+            <a:r>
+              <a:rPr lang="en-US" sz="1600" b="1" dirty="0"/>
+              <a:t>/</a:t>
+            </a:r>
+            <a:r>
+              <a:rPr lang="en-US" sz="1600" b="1" dirty="0" err="1"/>
+              <a:t>dosedanje</a:t>
+            </a:r>
+            <a:r>
+              <a:rPr lang="en-US" sz="1600" b="1" dirty="0"/>
+              <a:t> </a:t>
+            </a:r>
+            <a:r>
+              <a:rPr lang="en-US" sz="1600" b="1" dirty="0" err="1"/>
+              <a:t>ugotovitve</a:t>
+            </a:r>
+            <a:r>
+              <a:rPr lang="en-US" sz="1600" b="1" dirty="0"/>
+              <a:t>/</a:t>
+            </a:r>
+            <a:r>
+              <a:rPr lang="en-US" sz="1600" b="1" dirty="0" err="1"/>
+              <a:t>odprta</a:t>
+            </a:r>
+            <a:r>
+              <a:rPr lang="en-US" sz="1600" b="1" dirty="0"/>
+              <a:t> </a:t>
+            </a:r>
+            <a:r>
+              <a:rPr lang="en-US" sz="1600" b="1" dirty="0" err="1"/>
+              <a:t>vprašanja</a:t>
+            </a:r>
+            <a:endParaRPr lang="en-US" sz="1600" b="1" dirty="0"/>
+          </a:p>
+        </p:txBody>
+      </p:sp>
+      <p:sp>
+        <p:nvSpPr>
+          <p:cNvPr id="12" name="Date Placeholder 11">
+            <a:extLst>
+              <a:ext uri="{FF2B5EF4-FFF2-40B4-BE49-F238E27FC236}">
+                <a16:creationId xmlns:a16="http://schemas.microsoft.com/office/drawing/2014/main" id="{14CA68B1-8009-4527-27A3-DE99EBD7172D}"/>
+              </a:ext>
+            </a:extLst>
+          </p:cNvPr>
+          <p:cNvSpPr>
+            <a:spLocks noGrp="1"/>
+          </p:cNvSpPr>
+          <p:nvPr>
+            <p:ph type="dt" sz="half" idx="10"/>
+          </p:nvPr>
+        </p:nvSpPr>
+        <p:spPr>
+          <a:xfrm>
+            <a:off x="76857" y="4800600"/>
+            <a:ext cx="3754164" cy="273844"/>
+          </a:xfrm>
+        </p:spPr>
+        <p:txBody>
+          <a:bodyPr/>
+          <a:lstStyle/>
+          <a:p>
+            <a:r>
+              <a:rPr lang="en-US" dirty="0"/>
+              <a:t>15. 4. 2026</a:t>
+            </a:r>
+          </a:p>
+        </p:txBody>
+      </p:sp>
+      <p:sp>
+        <p:nvSpPr>
+          <p:cNvPr id="13" name="Footer Placeholder 12">
+            <a:extLst>
+              <a:ext uri="{FF2B5EF4-FFF2-40B4-BE49-F238E27FC236}">
+                <a16:creationId xmlns:a16="http://schemas.microsoft.com/office/drawing/2014/main" id="{BFFE8ABD-A532-56F3-A0AA-D0BDFA38A241}"/>
+              </a:ext>
+            </a:extLst>
+          </p:cNvPr>
+          <p:cNvSpPr>
+            <a:spLocks noGrp="1"/>
+          </p:cNvSpPr>
+          <p:nvPr>
+            <p:ph type="ftr" sz="quarter" idx="11"/>
+          </p:nvPr>
+        </p:nvSpPr>
+        <p:spPr>
+          <a:xfrm>
+            <a:off x="3028950" y="4767263"/>
+            <a:ext cx="3086100" cy="273844"/>
+          </a:xfrm>
+        </p:spPr>
+        <p:txBody>
+          <a:bodyPr/>
+          <a:lstStyle/>
+          <a:p>
+            <a:r>
+              <a:rPr lang="en-US" dirty="0"/>
+              <a:t>PR25-26, </a:t>
+            </a:r>
+            <a:r>
+              <a:rPr lang="en-US" dirty="0" err="1"/>
+              <a:t>Vmesna</a:t>
+            </a:r>
+            <a:r>
+              <a:rPr lang="en-US" dirty="0"/>
+              <a:t> </a:t>
+            </a:r>
+            <a:r>
+              <a:rPr lang="en-US" dirty="0" err="1"/>
+              <a:t>predstavitev</a:t>
+            </a:r>
+            <a:endParaRPr lang="en-US" dirty="0"/>
+          </a:p>
+        </p:txBody>
+      </p:sp>
     </p:spTree>
     <p:extLst>
       <p:ext uri="{BB962C8B-B14F-4D97-AF65-F5344CB8AC3E}">
@@ -6398,7 +7497,7 @@
 </p:sld>
 </file>
 
-<file path=ppt/slides/slide4.xml><?xml version="1.0" encoding="utf-8"?>
+<file path=ppt/slides/slide5.xml><?xml version="1.0" encoding="utf-8"?>
 <p:sld xmlns:a="http://schemas.openxmlformats.org/drawingml/2006/main" xmlns:r="http://schemas.openxmlformats.org/officeDocument/2006/relationships" xmlns:p="http://schemas.openxmlformats.org/presentationml/2006/main">
   <p:cSld>
     <p:spTree>
@@ -6590,7 +7689,7 @@
           <a:p>
             <a:fld id="{03BC8BC1-971C-5C4D-898D-87CE7EF1EB36}" type="slidenum">
               <a:rPr lang="en-US" smtClean="0"/>
-              <a:t>4</a:t>
+              <a:t>5</a:t>
             </a:fld>
             <a:endParaRPr lang="en-US"/>
           </a:p>

--- a/PR2025-26_VMESNA_10.pptx
+++ b/PR2025-26_VMESNA_10.pptx
@@ -6588,7 +6588,7 @@
         <p:spPr>
           <a:xfrm>
             <a:off x="92765" y="589356"/>
-            <a:ext cx="4403432" cy="4177907"/>
+            <a:ext cx="2593285" cy="4177907"/>
           </a:xfrm>
           <a:ln>
             <a:solidFill>
@@ -6606,8 +6606,54 @@
               <a:buNone/>
             </a:pPr>
             <a:r>
+              <a:rPr lang="en-US" sz="1600" b="1" dirty="0" err="1"/>
+              <a:t>Primerjava</a:t>
+            </a:r>
+            <a:r>
+              <a:rPr lang="en-US" sz="1600" b="1" dirty="0"/>
+              <a:t> </a:t>
+            </a:r>
+            <a:r>
+              <a:rPr lang="en-US" sz="1600" b="1" dirty="0" err="1"/>
+              <a:t>povprečnih</a:t>
+            </a:r>
+            <a:r>
+              <a:rPr lang="en-US" sz="1600" b="1" dirty="0"/>
+              <a:t> </a:t>
+            </a:r>
+            <a:r>
+              <a:rPr lang="en-US" sz="1600" b="1" dirty="0" err="1"/>
+              <a:t>krogov</a:t>
+            </a:r>
+            <a:r>
+              <a:rPr lang="en-US" sz="1600" b="1" dirty="0"/>
+              <a:t> v </a:t>
+            </a:r>
+            <a:r>
+              <a:rPr lang="en-US" sz="1600" b="1" dirty="0" err="1"/>
+              <a:t>deževnih</a:t>
+            </a:r>
+            <a:r>
+              <a:rPr lang="en-US" sz="1600" b="1" dirty="0"/>
+              <a:t> </a:t>
+            </a:r>
+            <a:r>
+              <a:rPr lang="en-US" sz="1600" b="1" dirty="0" err="1"/>
+              <a:t>razmerah</a:t>
+            </a:r>
+            <a:r>
+              <a:rPr lang="en-US" sz="1600" b="1" dirty="0"/>
+              <a:t>:</a:t>
+            </a:r>
+          </a:p>
+          <a:p>
+            <a:pPr>
+              <a:buFontTx/>
+              <a:buChar char="-"/>
+            </a:pPr>
+            <a:r>
               <a:rPr lang="en-US" sz="1600" dirty="0" err="1"/>
-              <a:t>Kako</a:t>
+              <a:t>Zberemo</a:t>
             </a:r>
             <a:r>
               <a:rPr lang="en-US" sz="1600" dirty="0"/>
@@ -6615,7 +6661,7 @@
             </a:r>
             <a:r>
               <a:rPr lang="en-US" sz="1600" dirty="0" err="1"/>
-              <a:t>boste</a:t>
+              <a:t>vse</a:t>
             </a:r>
             <a:r>
               <a:rPr lang="en-US" sz="1600" dirty="0"/>
@@ -6623,7 +6669,15 @@
             </a:r>
             <a:r>
               <a:rPr lang="en-US" sz="1600" dirty="0" err="1"/>
-              <a:t>dosegli</a:t>
+              <a:t>kroge</a:t>
+            </a:r>
+            <a:r>
+              <a:rPr lang="en-US" sz="1600" dirty="0"/>
+              <a:t> v </a:t>
+            </a:r>
+            <a:r>
+              <a:rPr lang="en-US" sz="1600" dirty="0" err="1"/>
+              <a:t>deževnih</a:t>
             </a:r>
             <a:r>
               <a:rPr lang="en-US" sz="1600" dirty="0"/>
@@ -6631,15 +6685,15 @@
             </a:r>
             <a:r>
               <a:rPr lang="en-US" sz="1600" dirty="0" err="1"/>
-              <a:t>cilj</a:t>
+              <a:t>razmerah</a:t>
             </a:r>
             <a:r>
               <a:rPr lang="en-US" sz="1600" dirty="0"/>
-              <a:t> 1 </a:t>
+              <a:t> in </a:t>
             </a:r>
             <a:r>
               <a:rPr lang="en-US" sz="1600" dirty="0" err="1"/>
-              <a:t>oziroma</a:t>
+              <a:t>pridobimo</a:t>
             </a:r>
             <a:r>
               <a:rPr lang="en-US" sz="1600" dirty="0"/>
@@ -6647,7 +6701,15 @@
             </a:r>
             <a:r>
               <a:rPr lang="en-US" sz="1600" dirty="0" err="1"/>
-              <a:t>odgovorili</a:t>
+              <a:t>povprečje</a:t>
+            </a:r>
+            <a:r>
+              <a:rPr lang="en-US" sz="1600" dirty="0"/>
+              <a:t> za </a:t>
+            </a:r>
+            <a:r>
+              <a:rPr lang="en-US" sz="1600" dirty="0" err="1"/>
+              <a:t>vsakega</a:t>
             </a:r>
             <a:r>
               <a:rPr lang="en-US" sz="1600" dirty="0"/>
@@ -6655,7 +6717,26 @@
             </a:r>
             <a:r>
               <a:rPr lang="en-US" sz="1600" dirty="0" err="1"/>
-              <a:t>na</a:t>
+              <a:t>voznika</a:t>
+            </a:r>
+            <a:endParaRPr lang="en-US" sz="1600" dirty="0"/>
+          </a:p>
+          <a:p>
+            <a:pPr>
+              <a:buFontTx/>
+              <a:buChar char="-"/>
+            </a:pPr>
+            <a:r>
+              <a:rPr lang="en-US" sz="1600" dirty="0" err="1"/>
+              <a:t>Vsaj</a:t>
+            </a:r>
+            <a:r>
+              <a:rPr lang="en-US" sz="1600" dirty="0"/>
+              <a:t> 50 </a:t>
+            </a:r>
+            <a:r>
+              <a:rPr lang="en-US" sz="1600" dirty="0" err="1"/>
+              <a:t>takšnih</a:t>
             </a:r>
             <a:r>
               <a:rPr lang="en-US" sz="1600" dirty="0"/>
@@ -6663,12 +6744,161 @@
             </a:r>
             <a:r>
               <a:rPr lang="en-US" sz="1600" dirty="0" err="1"/>
-              <a:t>vprašanje</a:t>
+              <a:t>krogov</a:t>
+            </a:r>
+            <a:endParaRPr lang="en-US" sz="1600" dirty="0"/>
+          </a:p>
+          <a:p>
+            <a:pPr>
+              <a:buFontTx/>
+              <a:buChar char="-"/>
+            </a:pPr>
+            <a:r>
+              <a:rPr lang="en-US" sz="1600" dirty="0" err="1"/>
+              <a:t>Št</a:t>
             </a:r>
             <a:r>
               <a:rPr lang="en-US" sz="1600" dirty="0"/>
-              <a:t> 1…</a:t>
-            </a:r>
+              <a:t>. </a:t>
+            </a:r>
+            <a:r>
+              <a:rPr lang="en-US" sz="1600" dirty="0" err="1"/>
+              <a:t>pridobljenih</a:t>
+            </a:r>
+            <a:r>
+              <a:rPr lang="en-US" sz="1600" dirty="0"/>
+              <a:t> </a:t>
+            </a:r>
+            <a:r>
+              <a:rPr lang="en-US" sz="1600" dirty="0" err="1"/>
+              <a:t>točk</a:t>
+            </a:r>
+            <a:r>
+              <a:rPr lang="en-US" sz="1600" dirty="0"/>
+              <a:t> </a:t>
+            </a:r>
+            <a:r>
+              <a:rPr lang="en-US" sz="1600" dirty="0" err="1"/>
+              <a:t>na</a:t>
+            </a:r>
+            <a:r>
+              <a:rPr lang="en-US" sz="1600" dirty="0"/>
+              <a:t> </a:t>
+            </a:r>
+            <a:r>
+              <a:rPr lang="en-US" sz="1600" dirty="0" err="1"/>
+              <a:t>takih</a:t>
+            </a:r>
+            <a:r>
+              <a:rPr lang="en-US" sz="1600" dirty="0"/>
+              <a:t> </a:t>
+            </a:r>
+            <a:r>
+              <a:rPr lang="en-US" sz="1600" dirty="0" err="1"/>
+              <a:t>dirkah</a:t>
+            </a:r>
+            <a:endParaRPr lang="en-US" sz="1600" dirty="0"/>
+          </a:p>
+          <a:p>
+            <a:pPr marL="0" indent="0">
+              <a:buNone/>
+            </a:pPr>
+            <a:endParaRPr lang="en-US" sz="1600" dirty="0"/>
+          </a:p>
+          <a:p>
+            <a:pPr marL="0" indent="0">
+              <a:buNone/>
+            </a:pPr>
+            <a:r>
+              <a:rPr lang="en-US" sz="1600" b="1" dirty="0" err="1"/>
+              <a:t>Primerjava</a:t>
+            </a:r>
+            <a:r>
+              <a:rPr lang="en-US" sz="1600" b="1" dirty="0"/>
+              <a:t> </a:t>
+            </a:r>
+            <a:r>
+              <a:rPr lang="en-US" sz="1600" b="1" dirty="0" err="1"/>
+              <a:t>časov</a:t>
+            </a:r>
+            <a:r>
+              <a:rPr lang="en-US" sz="1600" b="1" dirty="0"/>
+              <a:t> glede </a:t>
+            </a:r>
+            <a:r>
+              <a:rPr lang="en-US" sz="1600" b="1" dirty="0" err="1"/>
+              <a:t>na</a:t>
+            </a:r>
+            <a:r>
+              <a:rPr lang="en-US" sz="1600" b="1" dirty="0"/>
+              <a:t> </a:t>
+            </a:r>
+            <a:r>
+              <a:rPr lang="en-US" sz="1600" b="1" dirty="0" err="1"/>
+              <a:t>vremenske</a:t>
+            </a:r>
+            <a:r>
+              <a:rPr lang="en-US" sz="1600" b="1" dirty="0"/>
+              <a:t> </a:t>
+            </a:r>
+            <a:r>
+              <a:rPr lang="en-US" sz="1600" b="1" dirty="0" err="1"/>
+              <a:t>razmere</a:t>
+            </a:r>
+            <a:r>
+              <a:rPr lang="en-US" sz="1600" b="1" dirty="0"/>
+              <a:t>:</a:t>
+            </a:r>
+          </a:p>
+          <a:p>
+            <a:pPr>
+              <a:buFontTx/>
+              <a:buChar char="-"/>
+            </a:pPr>
+            <a:r>
+              <a:rPr lang="en-US" sz="1600" dirty="0"/>
+              <a:t>Modro: </a:t>
+            </a:r>
+            <a:r>
+              <a:rPr lang="en-US" sz="1600" dirty="0" err="1"/>
+              <a:t>deževne</a:t>
+            </a:r>
+            <a:r>
+              <a:rPr lang="en-US" sz="1600" dirty="0"/>
+              <a:t> </a:t>
+            </a:r>
+            <a:r>
+              <a:rPr lang="en-US" sz="1600" dirty="0" err="1"/>
+              <a:t>razmere</a:t>
+            </a:r>
+            <a:endParaRPr lang="en-US" sz="1600" dirty="0"/>
+          </a:p>
+          <a:p>
+            <a:pPr>
+              <a:buFontTx/>
+              <a:buChar char="-"/>
+            </a:pPr>
+            <a:r>
+              <a:rPr lang="en-US" sz="1600" dirty="0" err="1"/>
+              <a:t>Oranžno</a:t>
+            </a:r>
+            <a:r>
+              <a:rPr lang="en-US" sz="1600" dirty="0"/>
+              <a:t>: </a:t>
+            </a:r>
+            <a:r>
+              <a:rPr lang="en-US" sz="1600" dirty="0" err="1"/>
+              <a:t>suhe</a:t>
+            </a:r>
+            <a:r>
+              <a:rPr lang="en-US" sz="1600" dirty="0"/>
+              <a:t> </a:t>
+            </a:r>
+            <a:r>
+              <a:rPr lang="en-US" sz="1600" dirty="0" err="1"/>
+              <a:t>razmere</a:t>
+            </a:r>
+            <a:endParaRPr lang="en-US" sz="1600" dirty="0"/>
           </a:p>
         </p:txBody>
       </p:sp>
@@ -6690,8 +6920,8 @@
         </p:nvSpPr>
         <p:spPr>
           <a:xfrm>
-            <a:off x="4588962" y="589356"/>
-            <a:ext cx="4462272" cy="4177907"/>
+            <a:off x="2874818" y="589356"/>
+            <a:ext cx="6176416" cy="4177907"/>
           </a:xfrm>
           <a:ln>
             <a:solidFill>
@@ -7484,6 +7714,194 @@
           </a:p>
         </p:txBody>
       </p:sp>
+      <p:pic>
+        <p:nvPicPr>
+          <p:cNvPr id="1026" name="Picture 2">
+            <a:extLst>
+              <a:ext uri="{FF2B5EF4-FFF2-40B4-BE49-F238E27FC236}">
+                <a16:creationId xmlns:a16="http://schemas.microsoft.com/office/drawing/2014/main" id="{44480408-0ED4-160C-7011-FFC62E935000}"/>
+              </a:ext>
+            </a:extLst>
+          </p:cNvPr>
+          <p:cNvPicPr>
+            <a:picLocks noChangeAspect="1" noChangeArrowheads="1"/>
+          </p:cNvPicPr>
+          <p:nvPr/>
+        </p:nvPicPr>
+        <p:blipFill>
+          <a:blip r:embed="rId2">
+            <a:extLst>
+              <a:ext uri="{28A0092B-C50C-407E-A947-70E740481C1C}">
+                <a14:useLocalDpi xmlns:a14="http://schemas.microsoft.com/office/drawing/2010/main" val="0"/>
+              </a:ext>
+            </a:extLst>
+          </a:blip>
+          <a:srcRect/>
+          <a:stretch>
+            <a:fillRect/>
+          </a:stretch>
+        </p:blipFill>
+        <p:spPr bwMode="auto">
+          <a:xfrm>
+            <a:off x="2382982" y="589356"/>
+            <a:ext cx="3388759" cy="1681437"/>
+          </a:xfrm>
+          <a:prstGeom prst="rect">
+            <a:avLst/>
+          </a:prstGeom>
+          <a:noFill/>
+          <a:extLst>
+            <a:ext uri="{909E8E84-426E-40DD-AFC4-6F175D3DCCD1}">
+              <a14:hiddenFill xmlns:a14="http://schemas.microsoft.com/office/drawing/2010/main">
+                <a:solidFill>
+                  <a:srgbClr val="FFFFFF"/>
+                </a:solidFill>
+              </a14:hiddenFill>
+            </a:ext>
+          </a:extLst>
+        </p:spPr>
+      </p:pic>
+      <p:pic>
+        <p:nvPicPr>
+          <p:cNvPr id="1028" name="Picture 4">
+            <a:extLst>
+              <a:ext uri="{FF2B5EF4-FFF2-40B4-BE49-F238E27FC236}">
+                <a16:creationId xmlns:a16="http://schemas.microsoft.com/office/drawing/2014/main" id="{704D9FE6-6FDB-0A36-D738-9368464E3593}"/>
+              </a:ext>
+            </a:extLst>
+          </p:cNvPr>
+          <p:cNvPicPr>
+            <a:picLocks noChangeAspect="1" noChangeArrowheads="1"/>
+          </p:cNvPicPr>
+          <p:nvPr/>
+        </p:nvPicPr>
+        <p:blipFill>
+          <a:blip r:embed="rId3">
+            <a:extLst>
+              <a:ext uri="{28A0092B-C50C-407E-A947-70E740481C1C}">
+                <a14:useLocalDpi xmlns:a14="http://schemas.microsoft.com/office/drawing/2010/main" val="0"/>
+              </a:ext>
+            </a:extLst>
+          </a:blip>
+          <a:srcRect/>
+          <a:stretch>
+            <a:fillRect/>
+          </a:stretch>
+        </p:blipFill>
+        <p:spPr bwMode="auto">
+          <a:xfrm>
+            <a:off x="2380608" y="2285423"/>
+            <a:ext cx="3391133" cy="1681437"/>
+          </a:xfrm>
+          <a:prstGeom prst="rect">
+            <a:avLst/>
+          </a:prstGeom>
+          <a:noFill/>
+          <a:extLst>
+            <a:ext uri="{909E8E84-426E-40DD-AFC4-6F175D3DCCD1}">
+              <a14:hiddenFill xmlns:a14="http://schemas.microsoft.com/office/drawing/2010/main">
+                <a:solidFill>
+                  <a:srgbClr val="FFFFFF"/>
+                </a:solidFill>
+              </a14:hiddenFill>
+            </a:ext>
+          </a:extLst>
+        </p:spPr>
+      </p:pic>
+      <p:pic>
+        <p:nvPicPr>
+          <p:cNvPr id="1030" name="Picture 6">
+            <a:extLst>
+              <a:ext uri="{FF2B5EF4-FFF2-40B4-BE49-F238E27FC236}">
+                <a16:creationId xmlns:a16="http://schemas.microsoft.com/office/drawing/2014/main" id="{3954F1ED-D85C-728D-037A-7A77A31D5E80}"/>
+              </a:ext>
+            </a:extLst>
+          </p:cNvPr>
+          <p:cNvPicPr>
+            <a:picLocks noChangeAspect="1" noChangeArrowheads="1"/>
+          </p:cNvPicPr>
+          <p:nvPr/>
+        </p:nvPicPr>
+        <p:blipFill>
+          <a:blip r:embed="rId4">
+            <a:extLst>
+              <a:ext uri="{28A0092B-C50C-407E-A947-70E740481C1C}">
+                <a14:useLocalDpi xmlns:a14="http://schemas.microsoft.com/office/drawing/2010/main" val="0"/>
+              </a:ext>
+            </a:extLst>
+          </a:blip>
+          <a:srcRect/>
+          <a:stretch>
+            <a:fillRect/>
+          </a:stretch>
+        </p:blipFill>
+        <p:spPr bwMode="auto">
+          <a:xfrm>
+            <a:off x="5782974" y="585787"/>
+            <a:ext cx="3314643" cy="1644662"/>
+          </a:xfrm>
+          <a:prstGeom prst="rect">
+            <a:avLst/>
+          </a:prstGeom>
+          <a:noFill/>
+          <a:extLst>
+            <a:ext uri="{909E8E84-426E-40DD-AFC4-6F175D3DCCD1}">
+              <a14:hiddenFill xmlns:a14="http://schemas.microsoft.com/office/drawing/2010/main">
+                <a:solidFill>
+                  <a:srgbClr val="FFFFFF"/>
+                </a:solidFill>
+              </a14:hiddenFill>
+            </a:ext>
+          </a:extLst>
+        </p:spPr>
+      </p:pic>
+      <p:pic>
+        <p:nvPicPr>
+          <p:cNvPr id="1032" name="Picture 8">
+            <a:extLst>
+              <a:ext uri="{FF2B5EF4-FFF2-40B4-BE49-F238E27FC236}">
+                <a16:creationId xmlns:a16="http://schemas.microsoft.com/office/drawing/2014/main" id="{C7539519-194B-EB23-E947-D825AE1112B7}"/>
+              </a:ext>
+            </a:extLst>
+          </p:cNvPr>
+          <p:cNvPicPr>
+            <a:picLocks noChangeAspect="1" noChangeArrowheads="1"/>
+          </p:cNvPicPr>
+          <p:nvPr/>
+        </p:nvPicPr>
+        <p:blipFill>
+          <a:blip r:embed="rId5">
+            <a:extLst>
+              <a:ext uri="{28A0092B-C50C-407E-A947-70E740481C1C}">
+                <a14:useLocalDpi xmlns:a14="http://schemas.microsoft.com/office/drawing/2010/main" val="0"/>
+              </a:ext>
+            </a:extLst>
+          </a:blip>
+          <a:srcRect/>
+          <a:stretch>
+            <a:fillRect/>
+          </a:stretch>
+        </p:blipFill>
+        <p:spPr bwMode="auto">
+          <a:xfrm>
+            <a:off x="5696270" y="2270793"/>
+            <a:ext cx="3447730" cy="1710697"/>
+          </a:xfrm>
+          <a:prstGeom prst="rect">
+            <a:avLst/>
+          </a:prstGeom>
+          <a:noFill/>
+          <a:extLst>
+            <a:ext uri="{909E8E84-426E-40DD-AFC4-6F175D3DCCD1}">
+              <a14:hiddenFill xmlns:a14="http://schemas.microsoft.com/office/drawing/2010/main">
+                <a:solidFill>
+                  <a:srgbClr val="FFFFFF"/>
+                </a:solidFill>
+              </a14:hiddenFill>
+            </a:ext>
+          </a:extLst>
+        </p:spPr>
+      </p:pic>
     </p:spTree>
     <p:extLst>
       <p:ext uri="{BB962C8B-B14F-4D97-AF65-F5344CB8AC3E}">

--- a/PR2025-26_VMESNA_10.pptx
+++ b/PR2025-26_VMESNA_10.pptx
@@ -5,17 +5,18 @@
     <p:sldMasterId id="2147483660" r:id="rId1"/>
   </p:sldMasterIdLst>
   <p:notesMasterIdLst>
-    <p:notesMasterId r:id="rId7"/>
+    <p:notesMasterId r:id="rId8"/>
   </p:notesMasterIdLst>
   <p:handoutMasterIdLst>
-    <p:handoutMasterId r:id="rId8"/>
+    <p:handoutMasterId r:id="rId9"/>
   </p:handoutMasterIdLst>
   <p:sldIdLst>
     <p:sldId id="256" r:id="rId2"/>
     <p:sldId id="258" r:id="rId3"/>
-    <p:sldId id="261" r:id="rId4"/>
-    <p:sldId id="260" r:id="rId5"/>
-    <p:sldId id="259" r:id="rId6"/>
+    <p:sldId id="262" r:id="rId4"/>
+    <p:sldId id="261" r:id="rId5"/>
+    <p:sldId id="260" r:id="rId6"/>
+    <p:sldId id="259" r:id="rId7"/>
   </p:sldIdLst>
   <p:sldSz cx="9144000" cy="5143500" type="screen16x9"/>
   <p:notesSz cx="6858000" cy="9144000"/>
@@ -3907,6 +3908,22 @@
             </a:r>
             <a:r>
               <a:rPr lang="en-US" sz="1600" dirty="0" err="1"/>
+              <a:t>odstranjevanje</a:t>
+            </a:r>
+            <a:r>
+              <a:rPr lang="en-US" sz="1600" dirty="0"/>
+              <a:t> </a:t>
+            </a:r>
+            <a:r>
+              <a:rPr lang="en-US" sz="1600" dirty="0" err="1"/>
+              <a:t>osamelcev</a:t>
+            </a:r>
+            <a:r>
+              <a:rPr lang="en-US" sz="1600" dirty="0"/>
+              <a:t>, </a:t>
+            </a:r>
+            <a:r>
+              <a:rPr lang="en-US" sz="1600" dirty="0" err="1"/>
               <a:t>združevanje</a:t>
             </a:r>
             <a:r>
@@ -4416,160 +4433,196 @@
             </a:r>
           </a:p>
           <a:p>
-            <a:pPr>
-              <a:buFontTx/>
-              <a:buChar char="-"/>
-            </a:pPr>
-            <a:r>
-              <a:rPr lang="en-US" sz="1600" dirty="0" err="1"/>
-              <a:t>Linearna</a:t>
-            </a:r>
-            <a:r>
-              <a:rPr lang="en-US" sz="1600" dirty="0"/>
-              <a:t> </a:t>
-            </a:r>
-            <a:r>
-              <a:rPr lang="en-US" sz="1600" dirty="0" err="1"/>
-              <a:t>regresija</a:t>
-            </a:r>
-            <a:endParaRPr lang="en-US" sz="1600" dirty="0"/>
-          </a:p>
-          <a:p>
-            <a:pPr>
-              <a:buFontTx/>
-              <a:buChar char="-"/>
-            </a:pPr>
-            <a:r>
-              <a:rPr lang="en-US" sz="1600" dirty="0"/>
-              <a:t>Heatmap</a:t>
-            </a:r>
-          </a:p>
-          <a:p>
-            <a:pPr>
-              <a:buFontTx/>
-              <a:buChar char="-"/>
-            </a:pPr>
-            <a:r>
-              <a:rPr lang="en-US" sz="1600" dirty="0" err="1"/>
-              <a:t>Statistična</a:t>
-            </a:r>
-            <a:r>
-              <a:rPr lang="en-US" sz="1600" dirty="0"/>
-              <a:t> </a:t>
-            </a:r>
-            <a:r>
-              <a:rPr lang="en-US" sz="1600" dirty="0" err="1"/>
-              <a:t>analiza</a:t>
-            </a:r>
-            <a:endParaRPr lang="en-US" sz="1600" dirty="0"/>
-          </a:p>
-          <a:p>
-            <a:pPr>
-              <a:buFontTx/>
-              <a:buChar char="-"/>
-            </a:pPr>
-            <a:endParaRPr lang="en-US" sz="1600" dirty="0"/>
-          </a:p>
-          <a:p>
             <a:pPr marL="0" indent="0">
               <a:buNone/>
             </a:pPr>
             <a:r>
-              <a:rPr lang="en-US" sz="1600" b="1" dirty="0" err="1"/>
-              <a:t>Primerjava</a:t>
-            </a:r>
-            <a:r>
-              <a:rPr lang="en-US" sz="1600" b="1" dirty="0"/>
+              <a:rPr lang="sl-SI" sz="1600" b="1" dirty="0"/>
+              <a:t>Cilj</a:t>
+            </a:r>
+          </a:p>
+          <a:p>
+            <a:r>
+              <a:rPr lang="en-GB" sz="1600" dirty="0" err="1"/>
+              <a:t>primerjava</a:t>
+            </a:r>
+            <a:r>
+              <a:rPr lang="en-GB" sz="1600" dirty="0"/>
               <a:t> </a:t>
             </a:r>
             <a:r>
-              <a:rPr lang="en-US" sz="1600" b="1" dirty="0" err="1"/>
-              <a:t>konstruktorjev</a:t>
-            </a:r>
-            <a:endParaRPr lang="en-US" sz="1600" b="1" dirty="0"/>
-          </a:p>
-          <a:p>
-            <a:pPr>
-              <a:buFontTx/>
-              <a:buChar char="-"/>
+              <a:rPr lang="en-GB" sz="1600" dirty="0" err="1"/>
+              <a:t>različnih</a:t>
+            </a:r>
+            <a:r>
+              <a:rPr lang="en-GB" sz="1600" dirty="0"/>
+              <a:t> </a:t>
+            </a:r>
+            <a:r>
+              <a:rPr lang="en-GB" sz="1600" dirty="0" err="1"/>
+              <a:t>zmesi</a:t>
+            </a:r>
+            <a:r>
+              <a:rPr lang="en-GB" sz="1600" dirty="0"/>
+              <a:t> gum</a:t>
+            </a:r>
+            <a:endParaRPr lang="sl-SI" sz="1600" dirty="0"/>
+          </a:p>
+          <a:p>
+            <a:pPr marL="0" indent="0">
+              <a:buNone/>
             </a:pPr>
             <a:r>
-              <a:rPr lang="en-US" sz="1600" dirty="0" err="1"/>
-              <a:t>Škatla</a:t>
-            </a:r>
-            <a:r>
-              <a:rPr lang="en-US" sz="1600" dirty="0"/>
-              <a:t> z </a:t>
-            </a:r>
-            <a:r>
-              <a:rPr lang="en-US" sz="1600" dirty="0" err="1"/>
-              <a:t>brki</a:t>
-            </a:r>
-            <a:endParaRPr lang="en-US" sz="1600" dirty="0"/>
-          </a:p>
-          <a:p>
-            <a:pPr>
-              <a:buFontTx/>
-              <a:buChar char="-"/>
+              <a:rPr lang="sl-SI" sz="1600" b="1" dirty="0"/>
+              <a:t>Metoda</a:t>
+            </a:r>
+          </a:p>
+          <a:p>
+            <a:r>
+              <a:rPr lang="en-GB" sz="1600" dirty="0" err="1"/>
+              <a:t>čiščenje</a:t>
+            </a:r>
+            <a:r>
+              <a:rPr lang="en-GB" sz="1600" dirty="0"/>
+              <a:t> </a:t>
+            </a:r>
+            <a:r>
+              <a:rPr lang="en-GB" sz="1600" dirty="0" err="1"/>
+              <a:t>podatkov</a:t>
+            </a:r>
+            <a:endParaRPr lang="sl-SI" sz="1600" dirty="0"/>
+          </a:p>
+          <a:p>
+            <a:r>
+              <a:rPr lang="en-GB" sz="1600" dirty="0" err="1"/>
+              <a:t>osnovna</a:t>
+            </a:r>
+            <a:r>
+              <a:rPr lang="en-GB" sz="1600" dirty="0"/>
+              <a:t> </a:t>
+            </a:r>
+            <a:r>
+              <a:rPr lang="en-GB" sz="1600" dirty="0" err="1"/>
+              <a:t>statistična</a:t>
+            </a:r>
+            <a:r>
+              <a:rPr lang="en-GB" sz="1600" dirty="0"/>
+              <a:t> </a:t>
+            </a:r>
+            <a:r>
+              <a:rPr lang="en-GB" sz="1600" dirty="0" err="1"/>
+              <a:t>analiza</a:t>
+            </a:r>
+            <a:endParaRPr lang="en-GB" sz="1600" dirty="0"/>
+          </a:p>
+          <a:p>
+            <a:r>
+              <a:rPr lang="en-GB" sz="1600" dirty="0" err="1"/>
+              <a:t>linearna</a:t>
+            </a:r>
+            <a:r>
+              <a:rPr lang="en-GB" sz="1600" dirty="0"/>
+              <a:t> </a:t>
+            </a:r>
+            <a:r>
+              <a:rPr lang="en-GB" sz="1600" dirty="0" err="1"/>
+              <a:t>regresija</a:t>
+            </a:r>
+            <a:endParaRPr lang="sl-SI" sz="1600" dirty="0"/>
+          </a:p>
+          <a:p>
+            <a:pPr marL="0" indent="0">
+              <a:buNone/>
             </a:pPr>
             <a:r>
-              <a:rPr lang="en-US" sz="1600" dirty="0"/>
-              <a:t>Heatmap</a:t>
-            </a:r>
-          </a:p>
-          <a:p>
-            <a:pPr>
-              <a:buFontTx/>
-              <a:buChar char="-"/>
-            </a:pPr>
-            <a:r>
-              <a:rPr lang="en-US" sz="1600" dirty="0" err="1"/>
-              <a:t>Stolpični</a:t>
-            </a:r>
-            <a:r>
-              <a:rPr lang="en-US" sz="1600" dirty="0"/>
-              <a:t> diagram</a:t>
-            </a:r>
-          </a:p>
-        </p:txBody>
-      </p:sp>
-      <p:pic>
-        <p:nvPicPr>
-          <p:cNvPr id="10" name="Content Placeholder 9">
-            <a:extLst>
-              <a:ext uri="{FF2B5EF4-FFF2-40B4-BE49-F238E27FC236}">
-                <a16:creationId xmlns:a16="http://schemas.microsoft.com/office/drawing/2014/main" id="{E992772C-EB13-7084-6958-34ED409F7150}"/>
-              </a:ext>
-            </a:extLst>
-          </p:cNvPr>
-          <p:cNvPicPr>
-            <a:picLocks noGrp="1" noChangeAspect="1"/>
-          </p:cNvPicPr>
-          <p:nvPr>
-            <p:ph sz="half" idx="2"/>
-          </p:nvPr>
-        </p:nvPicPr>
-        <p:blipFill>
-          <a:blip r:embed="rId2"/>
-          <a:stretch>
-            <a:fillRect/>
-          </a:stretch>
-        </p:blipFill>
-        <p:spPr>
-          <a:xfrm>
-            <a:off x="5793812" y="386272"/>
-            <a:ext cx="3215016" cy="2842202"/>
-          </a:xfrm>
-          <a:prstGeom prst="rect">
-            <a:avLst/>
-          </a:prstGeom>
-          <a:ln>
-            <a:solidFill>
-              <a:prstClr val="black"/>
-            </a:solidFill>
-          </a:ln>
-        </p:spPr>
-      </p:pic>
+              <a:rPr lang="sl-SI" sz="1600" b="1" dirty="0"/>
+              <a:t>Rezultati</a:t>
+            </a:r>
+          </a:p>
+          <a:p>
+            <a:r>
+              <a:rPr lang="en-GB" sz="1600" dirty="0" err="1"/>
+              <a:t>povprečen</a:t>
+            </a:r>
+            <a:r>
+              <a:rPr lang="en-GB" sz="1600" dirty="0"/>
+              <a:t> </a:t>
+            </a:r>
+            <a:r>
+              <a:rPr lang="en-GB" sz="1600" dirty="0" err="1"/>
+              <a:t>čas</a:t>
+            </a:r>
+            <a:r>
+              <a:rPr lang="en-GB" sz="1600" dirty="0"/>
+              <a:t> </a:t>
+            </a:r>
+            <a:r>
+              <a:rPr lang="en-GB" sz="1600" dirty="0" err="1"/>
+              <a:t>kroga</a:t>
+            </a:r>
+            <a:r>
+              <a:rPr lang="en-GB" sz="1600" dirty="0"/>
+              <a:t> se s </a:t>
+            </a:r>
+            <a:r>
+              <a:rPr lang="en-GB" sz="1600" dirty="0" err="1"/>
+              <a:t>starostjo</a:t>
+            </a:r>
+            <a:r>
+              <a:rPr lang="en-GB" sz="1600" dirty="0"/>
+              <a:t> gum </a:t>
+            </a:r>
+            <a:r>
+              <a:rPr lang="en-GB" sz="1600" dirty="0" err="1"/>
+              <a:t>povečuje</a:t>
+            </a:r>
+            <a:endParaRPr lang="el-GR" sz="1600" dirty="0"/>
+          </a:p>
+          <a:p>
+            <a:r>
+              <a:rPr lang="en-GB" sz="1600" dirty="0" err="1"/>
+              <a:t>opazne</a:t>
+            </a:r>
+            <a:r>
+              <a:rPr lang="en-GB" sz="1600" dirty="0"/>
+              <a:t> </a:t>
+            </a:r>
+            <a:r>
+              <a:rPr lang="en-GB" sz="1600" dirty="0" err="1"/>
+              <a:t>razlike</a:t>
+            </a:r>
+            <a:r>
+              <a:rPr lang="en-GB" sz="1600" dirty="0"/>
+              <a:t> med </a:t>
+            </a:r>
+            <a:r>
+              <a:rPr lang="en-GB" sz="1600" dirty="0" err="1"/>
+              <a:t>dirkami</a:t>
+            </a:r>
+            <a:r>
+              <a:rPr lang="en-GB" sz="1600" dirty="0"/>
+              <a:t> (</a:t>
+            </a:r>
+            <a:r>
+              <a:rPr lang="en-GB" sz="1600" dirty="0" err="1"/>
+              <a:t>pogoji</a:t>
+            </a:r>
+            <a:r>
+              <a:rPr lang="en-GB" sz="1600" dirty="0"/>
+              <a:t>, </a:t>
+            </a:r>
+            <a:r>
+              <a:rPr lang="en-GB" sz="1600" dirty="0" err="1"/>
+              <a:t>taktike</a:t>
+            </a:r>
+            <a:r>
+              <a:rPr lang="en-GB" sz="1600" dirty="0"/>
+              <a:t>)</a:t>
+            </a:r>
+            <a:endParaRPr lang="en-US" sz="1300" dirty="0"/>
+          </a:p>
+        </p:txBody>
+      </p:sp>
       <p:sp>
         <p:nvSpPr>
           <p:cNvPr id="7" name="Slide Number Placeholder 6">
@@ -5347,10 +5400,40 @@
       </p:sp>
       <p:pic>
         <p:nvPicPr>
-          <p:cNvPr id="15" name="Picture 14">
+          <p:cNvPr id="23" name="Picture 22">
             <a:extLst>
               <a:ext uri="{FF2B5EF4-FFF2-40B4-BE49-F238E27FC236}">
-                <a16:creationId xmlns:a16="http://schemas.microsoft.com/office/drawing/2014/main" id="{8407A208-E6CC-57AE-C13B-D7640801DF9D}"/>
+                <a16:creationId xmlns:a16="http://schemas.microsoft.com/office/drawing/2014/main" id="{3B279256-EDDE-5953-EF44-D90A1C80F57F}"/>
+              </a:ext>
+            </a:extLst>
+          </p:cNvPr>
+          <p:cNvPicPr>
+            <a:picLocks noChangeAspect="1"/>
+          </p:cNvPicPr>
+          <p:nvPr/>
+        </p:nvPicPr>
+        <p:blipFill>
+          <a:blip r:embed="rId2"/>
+          <a:stretch>
+            <a:fillRect/>
+          </a:stretch>
+        </p:blipFill>
+        <p:spPr>
+          <a:xfrm>
+            <a:off x="5231737" y="3536378"/>
+            <a:ext cx="2906579" cy="1301040"/>
+          </a:xfrm>
+          <a:prstGeom prst="rect">
+            <a:avLst/>
+          </a:prstGeom>
+        </p:spPr>
+      </p:pic>
+      <p:pic>
+        <p:nvPicPr>
+          <p:cNvPr id="6" name="Picture 5">
+            <a:extLst>
+              <a:ext uri="{FF2B5EF4-FFF2-40B4-BE49-F238E27FC236}">
+                <a16:creationId xmlns:a16="http://schemas.microsoft.com/office/drawing/2014/main" id="{D8493661-9FF1-0828-A89A-645811DD01C1}"/>
               </a:ext>
             </a:extLst>
           </p:cNvPr>
@@ -5367,68 +5450,8 @@
         </p:blipFill>
         <p:spPr>
           <a:xfrm>
-            <a:off x="2253565" y="2514225"/>
-            <a:ext cx="3686197" cy="2286375"/>
-          </a:xfrm>
-          <a:prstGeom prst="rect">
-            <a:avLst/>
-          </a:prstGeom>
-        </p:spPr>
-      </p:pic>
-      <p:pic>
-        <p:nvPicPr>
-          <p:cNvPr id="21" name="Picture 20">
-            <a:extLst>
-              <a:ext uri="{FF2B5EF4-FFF2-40B4-BE49-F238E27FC236}">
-                <a16:creationId xmlns:a16="http://schemas.microsoft.com/office/drawing/2014/main" id="{BA3BAC73-A09D-1638-F70E-2A3A45D2FB1A}"/>
-              </a:ext>
-            </a:extLst>
-          </p:cNvPr>
-          <p:cNvPicPr>
-            <a:picLocks noChangeAspect="1"/>
-          </p:cNvPicPr>
-          <p:nvPr/>
-        </p:nvPicPr>
-        <p:blipFill>
-          <a:blip r:embed="rId4"/>
-          <a:stretch>
-            <a:fillRect/>
-          </a:stretch>
-        </p:blipFill>
-        <p:spPr>
-          <a:xfrm>
-            <a:off x="2938329" y="376238"/>
-            <a:ext cx="2855483" cy="2137988"/>
-          </a:xfrm>
-          <a:prstGeom prst="rect">
-            <a:avLst/>
-          </a:prstGeom>
-        </p:spPr>
-      </p:pic>
-      <p:pic>
-        <p:nvPicPr>
-          <p:cNvPr id="23" name="Picture 22">
-            <a:extLst>
-              <a:ext uri="{FF2B5EF4-FFF2-40B4-BE49-F238E27FC236}">
-                <a16:creationId xmlns:a16="http://schemas.microsoft.com/office/drawing/2014/main" id="{3B279256-EDDE-5953-EF44-D90A1C80F57F}"/>
-              </a:ext>
-            </a:extLst>
-          </p:cNvPr>
-          <p:cNvPicPr>
-            <a:picLocks noChangeAspect="1"/>
-          </p:cNvPicPr>
-          <p:nvPr/>
-        </p:nvPicPr>
-        <p:blipFill>
-          <a:blip r:embed="rId5"/>
-          <a:stretch>
-            <a:fillRect/>
-          </a:stretch>
-        </p:blipFill>
-        <p:spPr>
-          <a:xfrm>
-            <a:off x="5939762" y="3205262"/>
-            <a:ext cx="3069066" cy="1373772"/>
+            <a:off x="4996599" y="556020"/>
+            <a:ext cx="3376856" cy="2985275"/>
           </a:xfrm>
           <a:prstGeom prst="rect">
             <a:avLst/>
@@ -5456,6 +5479,1165 @@
         <p:cNvPr id="1" name="">
           <a:extLst>
             <a:ext uri="{FF2B5EF4-FFF2-40B4-BE49-F238E27FC236}">
+              <a16:creationId xmlns:a16="http://schemas.microsoft.com/office/drawing/2014/main" id="{60480395-2CE6-867A-1591-38938F3EC712}"/>
+            </a:ext>
+          </a:extLst>
+        </p:cNvPr>
+        <p:cNvGrpSpPr/>
+        <p:nvPr/>
+      </p:nvGrpSpPr>
+      <p:grpSpPr>
+        <a:xfrm>
+          <a:off x="0" y="0"/>
+          <a:ext cx="0" cy="0"/>
+          <a:chOff x="0" y="0"/>
+          <a:chExt cx="0" cy="0"/>
+        </a:xfrm>
+      </p:grpSpPr>
+      <p:sp>
+        <p:nvSpPr>
+          <p:cNvPr id="3" name="Content Placeholder 2">
+            <a:extLst>
+              <a:ext uri="{FF2B5EF4-FFF2-40B4-BE49-F238E27FC236}">
+                <a16:creationId xmlns:a16="http://schemas.microsoft.com/office/drawing/2014/main" id="{79986D9F-B4E1-4A39-84B6-8CA11BD0A59D}"/>
+              </a:ext>
+            </a:extLst>
+          </p:cNvPr>
+          <p:cNvSpPr>
+            <a:spLocks noGrp="1"/>
+          </p:cNvSpPr>
+          <p:nvPr>
+            <p:ph sz="half" idx="1"/>
+          </p:nvPr>
+        </p:nvSpPr>
+        <p:spPr>
+          <a:xfrm>
+            <a:off x="92765" y="589356"/>
+            <a:ext cx="4403432" cy="4177907"/>
+          </a:xfrm>
+          <a:ln>
+            <a:solidFill>
+              <a:schemeClr val="tx1"/>
+            </a:solidFill>
+          </a:ln>
+        </p:spPr>
+        <p:txBody>
+          <a:bodyPr>
+            <a:normAutofit/>
+          </a:bodyPr>
+          <a:lstStyle/>
+          <a:p>
+            <a:pPr marL="0" indent="0">
+              <a:buNone/>
+            </a:pPr>
+            <a:r>
+              <a:rPr lang="en-US" sz="1600" b="1" dirty="0" err="1"/>
+              <a:t>Primerjava</a:t>
+            </a:r>
+            <a:r>
+              <a:rPr lang="en-US" sz="1600" b="1" dirty="0"/>
+              <a:t> </a:t>
+            </a:r>
+            <a:r>
+              <a:rPr lang="en-US" sz="1600" b="1" dirty="0" err="1"/>
+              <a:t>konstruktorjev</a:t>
+            </a:r>
+            <a:endParaRPr lang="en-US" sz="1600" b="1" dirty="0"/>
+          </a:p>
+          <a:p>
+            <a:pPr marL="0" indent="0">
+              <a:buNone/>
+            </a:pPr>
+            <a:r>
+              <a:rPr lang="sl-SI" sz="1600" b="1" dirty="0"/>
+              <a:t>Cilj</a:t>
+            </a:r>
+          </a:p>
+          <a:p>
+            <a:r>
+              <a:rPr lang="sl-SI" sz="1600" dirty="0"/>
+              <a:t> </a:t>
+            </a:r>
+            <a:r>
+              <a:rPr lang="en-GB" sz="1600" dirty="0" err="1"/>
+              <a:t>ugotoviti</a:t>
+            </a:r>
+            <a:r>
+              <a:rPr lang="en-GB" sz="1600" dirty="0"/>
+              <a:t> </a:t>
+            </a:r>
+            <a:r>
+              <a:rPr lang="en-GB" sz="1600" dirty="0" err="1"/>
+              <a:t>katere</a:t>
+            </a:r>
+            <a:r>
+              <a:rPr lang="en-GB" sz="1600" dirty="0"/>
+              <a:t> </a:t>
+            </a:r>
+            <a:r>
+              <a:rPr lang="en-GB" sz="1600" dirty="0" err="1"/>
+              <a:t>ekipe</a:t>
+            </a:r>
+            <a:r>
+              <a:rPr lang="en-GB" sz="1600" dirty="0"/>
+              <a:t> so </a:t>
+            </a:r>
+            <a:r>
+              <a:rPr lang="en-GB" sz="1600" dirty="0" err="1"/>
+              <a:t>najbolj</a:t>
+            </a:r>
+            <a:r>
+              <a:rPr lang="en-GB" sz="1600" dirty="0"/>
+              <a:t> </a:t>
+            </a:r>
+            <a:r>
+              <a:rPr lang="en-GB" sz="1600" dirty="0" err="1"/>
+              <a:t>konkurenčne</a:t>
+            </a:r>
+            <a:endParaRPr lang="en-GB" sz="1600" dirty="0"/>
+          </a:p>
+          <a:p>
+            <a:pPr marL="0" indent="0">
+              <a:buNone/>
+            </a:pPr>
+            <a:r>
+              <a:rPr lang="sl-SI" sz="1600" b="1" dirty="0"/>
+              <a:t>Metoda</a:t>
+            </a:r>
+            <a:endParaRPr lang="en-GB" sz="1600" b="1" dirty="0"/>
+          </a:p>
+          <a:p>
+            <a:r>
+              <a:rPr lang="en-GB" sz="1600" dirty="0" err="1"/>
+              <a:t>čiščenje</a:t>
+            </a:r>
+            <a:r>
+              <a:rPr lang="en-GB" sz="1600" dirty="0"/>
+              <a:t> </a:t>
+            </a:r>
+            <a:r>
+              <a:rPr lang="en-GB" sz="1600" dirty="0" err="1"/>
+              <a:t>podatkov</a:t>
+            </a:r>
+            <a:endParaRPr lang="sl-SI" sz="1600" dirty="0"/>
+          </a:p>
+          <a:p>
+            <a:r>
+              <a:rPr lang="en-GB" sz="1600" dirty="0" err="1"/>
+              <a:t>osnovna</a:t>
+            </a:r>
+            <a:r>
+              <a:rPr lang="en-GB" sz="1600" dirty="0"/>
+              <a:t> </a:t>
+            </a:r>
+            <a:r>
+              <a:rPr lang="en-GB" sz="1600" dirty="0" err="1"/>
+              <a:t>statistična</a:t>
+            </a:r>
+            <a:r>
+              <a:rPr lang="en-GB" sz="1600" dirty="0"/>
+              <a:t> </a:t>
+            </a:r>
+            <a:r>
+              <a:rPr lang="en-GB" sz="1600" dirty="0" err="1"/>
+              <a:t>analiza</a:t>
+            </a:r>
+            <a:endParaRPr lang="en-GB" sz="1600" dirty="0"/>
+          </a:p>
+          <a:p>
+            <a:pPr marL="0" indent="0">
+              <a:buNone/>
+            </a:pPr>
+            <a:r>
+              <a:rPr lang="sl-SI" sz="1600" b="1" dirty="0"/>
+              <a:t>Rezultati</a:t>
+            </a:r>
+            <a:endParaRPr lang="en-GB" sz="1600" b="1" dirty="0"/>
+          </a:p>
+          <a:p>
+            <a:r>
+              <a:rPr lang="en-GB" sz="1600" dirty="0" err="1"/>
+              <a:t>vidno</a:t>
+            </a:r>
+            <a:r>
+              <a:rPr lang="en-GB" sz="1600" dirty="0"/>
+              <a:t> je </a:t>
+            </a:r>
+            <a:r>
+              <a:rPr lang="en-GB" sz="1600" dirty="0" err="1"/>
+              <a:t>katere</a:t>
+            </a:r>
+            <a:r>
+              <a:rPr lang="en-GB" sz="1600" dirty="0"/>
+              <a:t> </a:t>
+            </a:r>
+            <a:r>
+              <a:rPr lang="en-GB" sz="1600" dirty="0" err="1"/>
+              <a:t>ekipe</a:t>
+            </a:r>
+            <a:r>
+              <a:rPr lang="en-GB" sz="1600" dirty="0"/>
+              <a:t> so </a:t>
+            </a:r>
+            <a:r>
+              <a:rPr lang="en-GB" sz="1600" dirty="0" err="1"/>
+              <a:t>bolj</a:t>
+            </a:r>
+            <a:r>
+              <a:rPr lang="en-GB" sz="1600" dirty="0"/>
+              <a:t> </a:t>
+            </a:r>
+            <a:r>
+              <a:rPr lang="en-GB" sz="1600" dirty="0" err="1"/>
+              <a:t>konkurenčne</a:t>
+            </a:r>
+            <a:endParaRPr lang="en-GB" sz="1600" dirty="0"/>
+          </a:p>
+          <a:p>
+            <a:r>
+              <a:rPr lang="en-GB" sz="1600" dirty="0" err="1"/>
+              <a:t>čas</a:t>
+            </a:r>
+            <a:r>
+              <a:rPr lang="en-GB" sz="1600" dirty="0"/>
+              <a:t> </a:t>
+            </a:r>
+            <a:r>
+              <a:rPr lang="en-GB" sz="1600" dirty="0" err="1"/>
+              <a:t>povprečnega</a:t>
+            </a:r>
+            <a:r>
+              <a:rPr lang="en-GB" sz="1600" dirty="0"/>
+              <a:t> </a:t>
+            </a:r>
+            <a:r>
+              <a:rPr lang="en-GB" sz="1600" dirty="0" err="1"/>
+              <a:t>kroga</a:t>
+            </a:r>
+            <a:r>
+              <a:rPr lang="en-GB" sz="1600" dirty="0"/>
+              <a:t> glede </a:t>
+            </a:r>
+            <a:r>
+              <a:rPr lang="en-GB" sz="1600" dirty="0" err="1"/>
+              <a:t>na</a:t>
+            </a:r>
+            <a:r>
+              <a:rPr lang="en-GB" sz="1600" dirty="0"/>
+              <a:t> </a:t>
+            </a:r>
+            <a:r>
+              <a:rPr lang="en-GB" sz="1600" dirty="0" err="1"/>
+              <a:t>najboljšo</a:t>
+            </a:r>
+            <a:r>
+              <a:rPr lang="en-GB" sz="1600" dirty="0"/>
+              <a:t> </a:t>
+            </a:r>
+            <a:r>
+              <a:rPr lang="en-GB" sz="1600" dirty="0" err="1"/>
+              <a:t>ekipo</a:t>
+            </a:r>
+            <a:r>
+              <a:rPr lang="en-GB" sz="1600" dirty="0"/>
+              <a:t> </a:t>
+            </a:r>
+            <a:r>
+              <a:rPr lang="en-GB" sz="1600" dirty="0" err="1"/>
+              <a:t>ni</a:t>
+            </a:r>
+            <a:r>
+              <a:rPr lang="en-GB" sz="1600" dirty="0"/>
+              <a:t> </a:t>
+            </a:r>
+            <a:r>
+              <a:rPr lang="en-GB" sz="1600" dirty="0" err="1"/>
+              <a:t>toočen</a:t>
+            </a:r>
+            <a:r>
+              <a:rPr lang="en-GB" sz="1600" dirty="0"/>
+              <a:t> </a:t>
+            </a:r>
+            <a:r>
+              <a:rPr lang="en-GB" sz="1600" dirty="0" err="1"/>
+              <a:t>pokazatelj</a:t>
+            </a:r>
+            <a:r>
+              <a:rPr lang="en-GB" sz="1600" dirty="0"/>
+              <a:t> </a:t>
+            </a:r>
+            <a:r>
+              <a:rPr lang="en-GB" sz="1600" dirty="0" err="1"/>
+              <a:t>končne</a:t>
+            </a:r>
+            <a:r>
+              <a:rPr lang="en-GB" sz="1600" dirty="0"/>
+              <a:t> </a:t>
+            </a:r>
+            <a:r>
+              <a:rPr lang="en-GB" sz="1600" dirty="0" err="1"/>
+              <a:t>uvrstitve</a:t>
+            </a:r>
+            <a:endParaRPr lang="en-US" sz="1300" dirty="0"/>
+          </a:p>
+        </p:txBody>
+      </p:sp>
+      <p:sp>
+        <p:nvSpPr>
+          <p:cNvPr id="7" name="Slide Number Placeholder 6">
+            <a:extLst>
+              <a:ext uri="{FF2B5EF4-FFF2-40B4-BE49-F238E27FC236}">
+                <a16:creationId xmlns:a16="http://schemas.microsoft.com/office/drawing/2014/main" id="{2BE85B36-BD6E-413D-0EF1-D956158A6093}"/>
+              </a:ext>
+            </a:extLst>
+          </p:cNvPr>
+          <p:cNvSpPr>
+            <a:spLocks noGrp="1"/>
+          </p:cNvSpPr>
+          <p:nvPr>
+            <p:ph type="sldNum" sz="quarter" idx="12"/>
+          </p:nvPr>
+        </p:nvSpPr>
+        <p:spPr/>
+        <p:txBody>
+          <a:bodyPr/>
+          <a:lstStyle/>
+          <a:p>
+            <a:fld id="{03BC8BC1-971C-5C4D-898D-87CE7EF1EB36}" type="slidenum">
+              <a:rPr lang="en-US" smtClean="0"/>
+              <a:t>3</a:t>
+            </a:fld>
+            <a:endParaRPr lang="en-US"/>
+          </a:p>
+        </p:txBody>
+      </p:sp>
+      <p:sp>
+        <p:nvSpPr>
+          <p:cNvPr id="8" name="Content Placeholder 2">
+            <a:extLst>
+              <a:ext uri="{FF2B5EF4-FFF2-40B4-BE49-F238E27FC236}">
+                <a16:creationId xmlns:a16="http://schemas.microsoft.com/office/drawing/2014/main" id="{56998495-D8A6-9308-A56F-34BD2FD0087D}"/>
+              </a:ext>
+            </a:extLst>
+          </p:cNvPr>
+          <p:cNvSpPr txBox="1">
+            <a:spLocks/>
+          </p:cNvSpPr>
+          <p:nvPr/>
+        </p:nvSpPr>
+        <p:spPr>
+          <a:xfrm>
+            <a:off x="92765" y="82696"/>
+            <a:ext cx="4403432" cy="372120"/>
+          </a:xfrm>
+          <a:prstGeom prst="rect">
+            <a:avLst/>
+          </a:prstGeom>
+          <a:ln>
+            <a:noFill/>
+          </a:ln>
+        </p:spPr>
+        <p:txBody>
+          <a:bodyPr vert="horz" lIns="91440" tIns="45720" rIns="91440" bIns="45720" rtlCol="0">
+            <a:normAutofit/>
+          </a:bodyPr>
+          <a:lstStyle>
+            <a:lvl1pPr marL="171450" indent="-171450" algn="l" defTabSz="685800" rtl="0" eaLnBrk="1" latinLnBrk="0" hangingPunct="1">
+              <a:lnSpc>
+                <a:spcPct val="90000"/>
+              </a:lnSpc>
+              <a:spcBef>
+                <a:spcPts val="750"/>
+              </a:spcBef>
+              <a:buFont typeface="Arial" panose="020B0604020202020204" pitchFamily="34" charset="0"/>
+              <a:buChar char="•"/>
+              <a:defRPr sz="2100" kern="1200">
+                <a:solidFill>
+                  <a:schemeClr val="tx1"/>
+                </a:solidFill>
+                <a:latin typeface="+mn-lt"/>
+                <a:ea typeface="+mn-ea"/>
+                <a:cs typeface="+mn-cs"/>
+              </a:defRPr>
+            </a:lvl1pPr>
+            <a:lvl2pPr marL="514350" indent="-171450" algn="l" defTabSz="685800" rtl="0" eaLnBrk="1" latinLnBrk="0" hangingPunct="1">
+              <a:lnSpc>
+                <a:spcPct val="90000"/>
+              </a:lnSpc>
+              <a:spcBef>
+                <a:spcPts val="375"/>
+              </a:spcBef>
+              <a:buFont typeface="Arial" panose="020B0604020202020204" pitchFamily="34" charset="0"/>
+              <a:buChar char="•"/>
+              <a:defRPr sz="1800" kern="1200">
+                <a:solidFill>
+                  <a:schemeClr val="tx1"/>
+                </a:solidFill>
+                <a:latin typeface="+mn-lt"/>
+                <a:ea typeface="+mn-ea"/>
+                <a:cs typeface="+mn-cs"/>
+              </a:defRPr>
+            </a:lvl2pPr>
+            <a:lvl3pPr marL="857250" indent="-171450" algn="l" defTabSz="685800" rtl="0" eaLnBrk="1" latinLnBrk="0" hangingPunct="1">
+              <a:lnSpc>
+                <a:spcPct val="90000"/>
+              </a:lnSpc>
+              <a:spcBef>
+                <a:spcPts val="375"/>
+              </a:spcBef>
+              <a:buFont typeface="Arial" panose="020B0604020202020204" pitchFamily="34" charset="0"/>
+              <a:buChar char="•"/>
+              <a:defRPr sz="1500" kern="1200">
+                <a:solidFill>
+                  <a:schemeClr val="tx1"/>
+                </a:solidFill>
+                <a:latin typeface="+mn-lt"/>
+                <a:ea typeface="+mn-ea"/>
+                <a:cs typeface="+mn-cs"/>
+              </a:defRPr>
+            </a:lvl3pPr>
+            <a:lvl4pPr marL="1200150" indent="-171450" algn="l" defTabSz="685800" rtl="0" eaLnBrk="1" latinLnBrk="0" hangingPunct="1">
+              <a:lnSpc>
+                <a:spcPct val="90000"/>
+              </a:lnSpc>
+              <a:spcBef>
+                <a:spcPts val="375"/>
+              </a:spcBef>
+              <a:buFont typeface="Arial" panose="020B0604020202020204" pitchFamily="34" charset="0"/>
+              <a:buChar char="•"/>
+              <a:defRPr sz="1350" kern="1200">
+                <a:solidFill>
+                  <a:schemeClr val="tx1"/>
+                </a:solidFill>
+                <a:latin typeface="+mn-lt"/>
+                <a:ea typeface="+mn-ea"/>
+                <a:cs typeface="+mn-cs"/>
+              </a:defRPr>
+            </a:lvl4pPr>
+            <a:lvl5pPr marL="1543050" indent="-171450" algn="l" defTabSz="685800" rtl="0" eaLnBrk="1" latinLnBrk="0" hangingPunct="1">
+              <a:lnSpc>
+                <a:spcPct val="90000"/>
+              </a:lnSpc>
+              <a:spcBef>
+                <a:spcPts val="375"/>
+              </a:spcBef>
+              <a:buFont typeface="Arial" panose="020B0604020202020204" pitchFamily="34" charset="0"/>
+              <a:buChar char="•"/>
+              <a:defRPr sz="1350" kern="1200">
+                <a:solidFill>
+                  <a:schemeClr val="tx1"/>
+                </a:solidFill>
+                <a:latin typeface="+mn-lt"/>
+                <a:ea typeface="+mn-ea"/>
+                <a:cs typeface="+mn-cs"/>
+              </a:defRPr>
+            </a:lvl5pPr>
+            <a:lvl6pPr marL="1885950" indent="-171450" algn="l" defTabSz="685800" rtl="0" eaLnBrk="1" latinLnBrk="0" hangingPunct="1">
+              <a:lnSpc>
+                <a:spcPct val="90000"/>
+              </a:lnSpc>
+              <a:spcBef>
+                <a:spcPts val="375"/>
+              </a:spcBef>
+              <a:buFont typeface="Arial" panose="020B0604020202020204" pitchFamily="34" charset="0"/>
+              <a:buChar char="•"/>
+              <a:defRPr sz="1350" kern="1200">
+                <a:solidFill>
+                  <a:schemeClr val="tx1"/>
+                </a:solidFill>
+                <a:latin typeface="+mn-lt"/>
+                <a:ea typeface="+mn-ea"/>
+                <a:cs typeface="+mn-cs"/>
+              </a:defRPr>
+            </a:lvl6pPr>
+            <a:lvl7pPr marL="2228850" indent="-171450" algn="l" defTabSz="685800" rtl="0" eaLnBrk="1" latinLnBrk="0" hangingPunct="1">
+              <a:lnSpc>
+                <a:spcPct val="90000"/>
+              </a:lnSpc>
+              <a:spcBef>
+                <a:spcPts val="375"/>
+              </a:spcBef>
+              <a:buFont typeface="Arial" panose="020B0604020202020204" pitchFamily="34" charset="0"/>
+              <a:buChar char="•"/>
+              <a:defRPr sz="1350" kern="1200">
+                <a:solidFill>
+                  <a:schemeClr val="tx1"/>
+                </a:solidFill>
+                <a:latin typeface="+mn-lt"/>
+                <a:ea typeface="+mn-ea"/>
+                <a:cs typeface="+mn-cs"/>
+              </a:defRPr>
+            </a:lvl7pPr>
+            <a:lvl8pPr marL="2571750" indent="-171450" algn="l" defTabSz="685800" rtl="0" eaLnBrk="1" latinLnBrk="0" hangingPunct="1">
+              <a:lnSpc>
+                <a:spcPct val="90000"/>
+              </a:lnSpc>
+              <a:spcBef>
+                <a:spcPts val="375"/>
+              </a:spcBef>
+              <a:buFont typeface="Arial" panose="020B0604020202020204" pitchFamily="34" charset="0"/>
+              <a:buChar char="•"/>
+              <a:defRPr sz="1350" kern="1200">
+                <a:solidFill>
+                  <a:schemeClr val="tx1"/>
+                </a:solidFill>
+                <a:latin typeface="+mn-lt"/>
+                <a:ea typeface="+mn-ea"/>
+                <a:cs typeface="+mn-cs"/>
+              </a:defRPr>
+            </a:lvl8pPr>
+            <a:lvl9pPr marL="2914650" indent="-171450" algn="l" defTabSz="685800" rtl="0" eaLnBrk="1" latinLnBrk="0" hangingPunct="1">
+              <a:lnSpc>
+                <a:spcPct val="90000"/>
+              </a:lnSpc>
+              <a:spcBef>
+                <a:spcPts val="375"/>
+              </a:spcBef>
+              <a:buFont typeface="Arial" panose="020B0604020202020204" pitchFamily="34" charset="0"/>
+              <a:buChar char="•"/>
+              <a:defRPr sz="1350" kern="1200">
+                <a:solidFill>
+                  <a:schemeClr val="tx1"/>
+                </a:solidFill>
+                <a:latin typeface="+mn-lt"/>
+                <a:ea typeface="+mn-ea"/>
+                <a:cs typeface="+mn-cs"/>
+              </a:defRPr>
+            </a:lvl9pPr>
+          </a:lstStyle>
+          <a:p>
+            <a:pPr marL="0" indent="0">
+              <a:buNone/>
+            </a:pPr>
+            <a:r>
+              <a:rPr lang="en-US" sz="1600" b="1" dirty="0" err="1"/>
+              <a:t>Podroben</a:t>
+            </a:r>
+            <a:r>
+              <a:rPr lang="en-US" sz="1600" b="1" dirty="0"/>
+              <a:t> </a:t>
+            </a:r>
+            <a:r>
+              <a:rPr lang="en-US" sz="1600" b="1" dirty="0" err="1"/>
+              <a:t>opis</a:t>
+            </a:r>
+            <a:r>
+              <a:rPr lang="en-US" sz="1600" b="1" dirty="0"/>
+              <a:t> </a:t>
+            </a:r>
+            <a:r>
+              <a:rPr lang="en-US" sz="1600" b="1" dirty="0" err="1"/>
+              <a:t>ciljev</a:t>
+            </a:r>
+            <a:r>
+              <a:rPr lang="en-US" sz="1600" b="1" dirty="0"/>
+              <a:t> in </a:t>
+            </a:r>
+            <a:r>
+              <a:rPr lang="en-US" sz="1600" b="1" dirty="0" err="1"/>
+              <a:t>metod</a:t>
+            </a:r>
+            <a:endParaRPr lang="en-US" sz="1600" b="1" dirty="0"/>
+          </a:p>
+        </p:txBody>
+      </p:sp>
+      <p:sp>
+        <p:nvSpPr>
+          <p:cNvPr id="11" name="Content Placeholder 11">
+            <a:extLst>
+              <a:ext uri="{FF2B5EF4-FFF2-40B4-BE49-F238E27FC236}">
+                <a16:creationId xmlns:a16="http://schemas.microsoft.com/office/drawing/2014/main" id="{91C58938-E051-7437-3631-6EF024B17D0E}"/>
+              </a:ext>
+            </a:extLst>
+          </p:cNvPr>
+          <p:cNvSpPr txBox="1">
+            <a:spLocks/>
+          </p:cNvSpPr>
+          <p:nvPr/>
+        </p:nvSpPr>
+        <p:spPr>
+          <a:xfrm>
+            <a:off x="4572000" y="720327"/>
+            <a:ext cx="4436828" cy="3040640"/>
+          </a:xfrm>
+          <a:prstGeom prst="rect">
+            <a:avLst/>
+          </a:prstGeom>
+        </p:spPr>
+        <p:txBody>
+          <a:bodyPr/>
+          <a:lstStyle>
+            <a:lvl1pPr marL="171450" indent="-171450" algn="l" defTabSz="685800" rtl="0" eaLnBrk="1" latinLnBrk="0" hangingPunct="1">
+              <a:lnSpc>
+                <a:spcPct val="90000"/>
+              </a:lnSpc>
+              <a:spcBef>
+                <a:spcPts val="750"/>
+              </a:spcBef>
+              <a:buFont typeface="Arial" panose="020B0604020202020204" pitchFamily="34" charset="0"/>
+              <a:buChar char="•"/>
+              <a:defRPr sz="2100" kern="1200">
+                <a:solidFill>
+                  <a:schemeClr val="tx1"/>
+                </a:solidFill>
+                <a:latin typeface="+mn-lt"/>
+                <a:ea typeface="+mn-ea"/>
+                <a:cs typeface="+mn-cs"/>
+              </a:defRPr>
+            </a:lvl1pPr>
+            <a:lvl2pPr marL="514350" indent="-171450" algn="l" defTabSz="685800" rtl="0" eaLnBrk="1" latinLnBrk="0" hangingPunct="1">
+              <a:lnSpc>
+                <a:spcPct val="90000"/>
+              </a:lnSpc>
+              <a:spcBef>
+                <a:spcPts val="375"/>
+              </a:spcBef>
+              <a:buFont typeface="Arial" panose="020B0604020202020204" pitchFamily="34" charset="0"/>
+              <a:buChar char="•"/>
+              <a:defRPr sz="1800" kern="1200">
+                <a:solidFill>
+                  <a:schemeClr val="tx1"/>
+                </a:solidFill>
+                <a:latin typeface="+mn-lt"/>
+                <a:ea typeface="+mn-ea"/>
+                <a:cs typeface="+mn-cs"/>
+              </a:defRPr>
+            </a:lvl2pPr>
+            <a:lvl3pPr marL="857250" indent="-171450" algn="l" defTabSz="685800" rtl="0" eaLnBrk="1" latinLnBrk="0" hangingPunct="1">
+              <a:lnSpc>
+                <a:spcPct val="90000"/>
+              </a:lnSpc>
+              <a:spcBef>
+                <a:spcPts val="375"/>
+              </a:spcBef>
+              <a:buFont typeface="Arial" panose="020B0604020202020204" pitchFamily="34" charset="0"/>
+              <a:buChar char="•"/>
+              <a:defRPr sz="1500" kern="1200">
+                <a:solidFill>
+                  <a:schemeClr val="tx1"/>
+                </a:solidFill>
+                <a:latin typeface="+mn-lt"/>
+                <a:ea typeface="+mn-ea"/>
+                <a:cs typeface="+mn-cs"/>
+              </a:defRPr>
+            </a:lvl3pPr>
+            <a:lvl4pPr marL="1200150" indent="-171450" algn="l" defTabSz="685800" rtl="0" eaLnBrk="1" latinLnBrk="0" hangingPunct="1">
+              <a:lnSpc>
+                <a:spcPct val="90000"/>
+              </a:lnSpc>
+              <a:spcBef>
+                <a:spcPts val="375"/>
+              </a:spcBef>
+              <a:buFont typeface="Arial" panose="020B0604020202020204" pitchFamily="34" charset="0"/>
+              <a:buChar char="•"/>
+              <a:defRPr sz="1350" kern="1200">
+                <a:solidFill>
+                  <a:schemeClr val="tx1"/>
+                </a:solidFill>
+                <a:latin typeface="+mn-lt"/>
+                <a:ea typeface="+mn-ea"/>
+                <a:cs typeface="+mn-cs"/>
+              </a:defRPr>
+            </a:lvl4pPr>
+            <a:lvl5pPr marL="1543050" indent="-171450" algn="l" defTabSz="685800" rtl="0" eaLnBrk="1" latinLnBrk="0" hangingPunct="1">
+              <a:lnSpc>
+                <a:spcPct val="90000"/>
+              </a:lnSpc>
+              <a:spcBef>
+                <a:spcPts val="375"/>
+              </a:spcBef>
+              <a:buFont typeface="Arial" panose="020B0604020202020204" pitchFamily="34" charset="0"/>
+              <a:buChar char="•"/>
+              <a:defRPr sz="1350" kern="1200">
+                <a:solidFill>
+                  <a:schemeClr val="tx1"/>
+                </a:solidFill>
+                <a:latin typeface="+mn-lt"/>
+                <a:ea typeface="+mn-ea"/>
+                <a:cs typeface="+mn-cs"/>
+              </a:defRPr>
+            </a:lvl5pPr>
+            <a:lvl6pPr marL="1885950" indent="-171450" algn="l" defTabSz="685800" rtl="0" eaLnBrk="1" latinLnBrk="0" hangingPunct="1">
+              <a:lnSpc>
+                <a:spcPct val="90000"/>
+              </a:lnSpc>
+              <a:spcBef>
+                <a:spcPts val="375"/>
+              </a:spcBef>
+              <a:buFont typeface="Arial" panose="020B0604020202020204" pitchFamily="34" charset="0"/>
+              <a:buChar char="•"/>
+              <a:defRPr sz="1350" kern="1200">
+                <a:solidFill>
+                  <a:schemeClr val="tx1"/>
+                </a:solidFill>
+                <a:latin typeface="+mn-lt"/>
+                <a:ea typeface="+mn-ea"/>
+                <a:cs typeface="+mn-cs"/>
+              </a:defRPr>
+            </a:lvl6pPr>
+            <a:lvl7pPr marL="2228850" indent="-171450" algn="l" defTabSz="685800" rtl="0" eaLnBrk="1" latinLnBrk="0" hangingPunct="1">
+              <a:lnSpc>
+                <a:spcPct val="90000"/>
+              </a:lnSpc>
+              <a:spcBef>
+                <a:spcPts val="375"/>
+              </a:spcBef>
+              <a:buFont typeface="Arial" panose="020B0604020202020204" pitchFamily="34" charset="0"/>
+              <a:buChar char="•"/>
+              <a:defRPr sz="1350" kern="1200">
+                <a:solidFill>
+                  <a:schemeClr val="tx1"/>
+                </a:solidFill>
+                <a:latin typeface="+mn-lt"/>
+                <a:ea typeface="+mn-ea"/>
+                <a:cs typeface="+mn-cs"/>
+              </a:defRPr>
+            </a:lvl7pPr>
+            <a:lvl8pPr marL="2571750" indent="-171450" algn="l" defTabSz="685800" rtl="0" eaLnBrk="1" latinLnBrk="0" hangingPunct="1">
+              <a:lnSpc>
+                <a:spcPct val="90000"/>
+              </a:lnSpc>
+              <a:spcBef>
+                <a:spcPts val="375"/>
+              </a:spcBef>
+              <a:buFont typeface="Arial" panose="020B0604020202020204" pitchFamily="34" charset="0"/>
+              <a:buChar char="•"/>
+              <a:defRPr sz="1350" kern="1200">
+                <a:solidFill>
+                  <a:schemeClr val="tx1"/>
+                </a:solidFill>
+                <a:latin typeface="+mn-lt"/>
+                <a:ea typeface="+mn-ea"/>
+                <a:cs typeface="+mn-cs"/>
+              </a:defRPr>
+            </a:lvl8pPr>
+            <a:lvl9pPr marL="2914650" indent="-171450" algn="l" defTabSz="685800" rtl="0" eaLnBrk="1" latinLnBrk="0" hangingPunct="1">
+              <a:lnSpc>
+                <a:spcPct val="90000"/>
+              </a:lnSpc>
+              <a:spcBef>
+                <a:spcPts val="375"/>
+              </a:spcBef>
+              <a:buFont typeface="Arial" panose="020B0604020202020204" pitchFamily="34" charset="0"/>
+              <a:buChar char="•"/>
+              <a:defRPr sz="1350" kern="1200">
+                <a:solidFill>
+                  <a:schemeClr val="tx1"/>
+                </a:solidFill>
+                <a:latin typeface="+mn-lt"/>
+                <a:ea typeface="+mn-ea"/>
+                <a:cs typeface="+mn-cs"/>
+              </a:defRPr>
+            </a:lvl9pPr>
+          </a:lstStyle>
+          <a:p>
+            <a:pPr marL="0" indent="0">
+              <a:buFont typeface="Arial" panose="020B0604020202020204" pitchFamily="34" charset="0"/>
+              <a:buNone/>
+            </a:pPr>
+            <a:endParaRPr lang="en-US" sz="1600" dirty="0"/>
+          </a:p>
+        </p:txBody>
+      </p:sp>
+      <p:sp>
+        <p:nvSpPr>
+          <p:cNvPr id="19" name="Content Placeholder 2">
+            <a:extLst>
+              <a:ext uri="{FF2B5EF4-FFF2-40B4-BE49-F238E27FC236}">
+                <a16:creationId xmlns:a16="http://schemas.microsoft.com/office/drawing/2014/main" id="{F2AB565F-9917-CFF1-52C4-BB66B41A173D}"/>
+              </a:ext>
+            </a:extLst>
+          </p:cNvPr>
+          <p:cNvSpPr txBox="1">
+            <a:spLocks/>
+          </p:cNvSpPr>
+          <p:nvPr/>
+        </p:nvSpPr>
+        <p:spPr>
+          <a:xfrm>
+            <a:off x="4588962" y="82696"/>
+            <a:ext cx="4462272" cy="372120"/>
+          </a:xfrm>
+          <a:prstGeom prst="rect">
+            <a:avLst/>
+          </a:prstGeom>
+          <a:ln>
+            <a:noFill/>
+          </a:ln>
+        </p:spPr>
+        <p:txBody>
+          <a:bodyPr vert="horz" lIns="91440" tIns="45720" rIns="91440" bIns="45720" rtlCol="0">
+            <a:normAutofit/>
+          </a:bodyPr>
+          <a:lstStyle>
+            <a:lvl1pPr marL="171450" indent="-171450" algn="l" defTabSz="685800" rtl="0" eaLnBrk="1" latinLnBrk="0" hangingPunct="1">
+              <a:lnSpc>
+                <a:spcPct val="90000"/>
+              </a:lnSpc>
+              <a:spcBef>
+                <a:spcPts val="750"/>
+              </a:spcBef>
+              <a:buFont typeface="Arial" panose="020B0604020202020204" pitchFamily="34" charset="0"/>
+              <a:buChar char="•"/>
+              <a:defRPr sz="2100" kern="1200">
+                <a:solidFill>
+                  <a:schemeClr val="tx1"/>
+                </a:solidFill>
+                <a:latin typeface="+mn-lt"/>
+                <a:ea typeface="+mn-ea"/>
+                <a:cs typeface="+mn-cs"/>
+              </a:defRPr>
+            </a:lvl1pPr>
+            <a:lvl2pPr marL="514350" indent="-171450" algn="l" defTabSz="685800" rtl="0" eaLnBrk="1" latinLnBrk="0" hangingPunct="1">
+              <a:lnSpc>
+                <a:spcPct val="90000"/>
+              </a:lnSpc>
+              <a:spcBef>
+                <a:spcPts val="375"/>
+              </a:spcBef>
+              <a:buFont typeface="Arial" panose="020B0604020202020204" pitchFamily="34" charset="0"/>
+              <a:buChar char="•"/>
+              <a:defRPr sz="1800" kern="1200">
+                <a:solidFill>
+                  <a:schemeClr val="tx1"/>
+                </a:solidFill>
+                <a:latin typeface="+mn-lt"/>
+                <a:ea typeface="+mn-ea"/>
+                <a:cs typeface="+mn-cs"/>
+              </a:defRPr>
+            </a:lvl2pPr>
+            <a:lvl3pPr marL="857250" indent="-171450" algn="l" defTabSz="685800" rtl="0" eaLnBrk="1" latinLnBrk="0" hangingPunct="1">
+              <a:lnSpc>
+                <a:spcPct val="90000"/>
+              </a:lnSpc>
+              <a:spcBef>
+                <a:spcPts val="375"/>
+              </a:spcBef>
+              <a:buFont typeface="Arial" panose="020B0604020202020204" pitchFamily="34" charset="0"/>
+              <a:buChar char="•"/>
+              <a:defRPr sz="1500" kern="1200">
+                <a:solidFill>
+                  <a:schemeClr val="tx1"/>
+                </a:solidFill>
+                <a:latin typeface="+mn-lt"/>
+                <a:ea typeface="+mn-ea"/>
+                <a:cs typeface="+mn-cs"/>
+              </a:defRPr>
+            </a:lvl3pPr>
+            <a:lvl4pPr marL="1200150" indent="-171450" algn="l" defTabSz="685800" rtl="0" eaLnBrk="1" latinLnBrk="0" hangingPunct="1">
+              <a:lnSpc>
+                <a:spcPct val="90000"/>
+              </a:lnSpc>
+              <a:spcBef>
+                <a:spcPts val="375"/>
+              </a:spcBef>
+              <a:buFont typeface="Arial" panose="020B0604020202020204" pitchFamily="34" charset="0"/>
+              <a:buChar char="•"/>
+              <a:defRPr sz="1350" kern="1200">
+                <a:solidFill>
+                  <a:schemeClr val="tx1"/>
+                </a:solidFill>
+                <a:latin typeface="+mn-lt"/>
+                <a:ea typeface="+mn-ea"/>
+                <a:cs typeface="+mn-cs"/>
+              </a:defRPr>
+            </a:lvl4pPr>
+            <a:lvl5pPr marL="1543050" indent="-171450" algn="l" defTabSz="685800" rtl="0" eaLnBrk="1" latinLnBrk="0" hangingPunct="1">
+              <a:lnSpc>
+                <a:spcPct val="90000"/>
+              </a:lnSpc>
+              <a:spcBef>
+                <a:spcPts val="375"/>
+              </a:spcBef>
+              <a:buFont typeface="Arial" panose="020B0604020202020204" pitchFamily="34" charset="0"/>
+              <a:buChar char="•"/>
+              <a:defRPr sz="1350" kern="1200">
+                <a:solidFill>
+                  <a:schemeClr val="tx1"/>
+                </a:solidFill>
+                <a:latin typeface="+mn-lt"/>
+                <a:ea typeface="+mn-ea"/>
+                <a:cs typeface="+mn-cs"/>
+              </a:defRPr>
+            </a:lvl5pPr>
+            <a:lvl6pPr marL="1885950" indent="-171450" algn="l" defTabSz="685800" rtl="0" eaLnBrk="1" latinLnBrk="0" hangingPunct="1">
+              <a:lnSpc>
+                <a:spcPct val="90000"/>
+              </a:lnSpc>
+              <a:spcBef>
+                <a:spcPts val="375"/>
+              </a:spcBef>
+              <a:buFont typeface="Arial" panose="020B0604020202020204" pitchFamily="34" charset="0"/>
+              <a:buChar char="•"/>
+              <a:defRPr sz="1350" kern="1200">
+                <a:solidFill>
+                  <a:schemeClr val="tx1"/>
+                </a:solidFill>
+                <a:latin typeface="+mn-lt"/>
+                <a:ea typeface="+mn-ea"/>
+                <a:cs typeface="+mn-cs"/>
+              </a:defRPr>
+            </a:lvl6pPr>
+            <a:lvl7pPr marL="2228850" indent="-171450" algn="l" defTabSz="685800" rtl="0" eaLnBrk="1" latinLnBrk="0" hangingPunct="1">
+              <a:lnSpc>
+                <a:spcPct val="90000"/>
+              </a:lnSpc>
+              <a:spcBef>
+                <a:spcPts val="375"/>
+              </a:spcBef>
+              <a:buFont typeface="Arial" panose="020B0604020202020204" pitchFamily="34" charset="0"/>
+              <a:buChar char="•"/>
+              <a:defRPr sz="1350" kern="1200">
+                <a:solidFill>
+                  <a:schemeClr val="tx1"/>
+                </a:solidFill>
+                <a:latin typeface="+mn-lt"/>
+                <a:ea typeface="+mn-ea"/>
+                <a:cs typeface="+mn-cs"/>
+              </a:defRPr>
+            </a:lvl7pPr>
+            <a:lvl8pPr marL="2571750" indent="-171450" algn="l" defTabSz="685800" rtl="0" eaLnBrk="1" latinLnBrk="0" hangingPunct="1">
+              <a:lnSpc>
+                <a:spcPct val="90000"/>
+              </a:lnSpc>
+              <a:spcBef>
+                <a:spcPts val="375"/>
+              </a:spcBef>
+              <a:buFont typeface="Arial" panose="020B0604020202020204" pitchFamily="34" charset="0"/>
+              <a:buChar char="•"/>
+              <a:defRPr sz="1350" kern="1200">
+                <a:solidFill>
+                  <a:schemeClr val="tx1"/>
+                </a:solidFill>
+                <a:latin typeface="+mn-lt"/>
+                <a:ea typeface="+mn-ea"/>
+                <a:cs typeface="+mn-cs"/>
+              </a:defRPr>
+            </a:lvl8pPr>
+            <a:lvl9pPr marL="2914650" indent="-171450" algn="l" defTabSz="685800" rtl="0" eaLnBrk="1" latinLnBrk="0" hangingPunct="1">
+              <a:lnSpc>
+                <a:spcPct val="90000"/>
+              </a:lnSpc>
+              <a:spcBef>
+                <a:spcPts val="375"/>
+              </a:spcBef>
+              <a:buFont typeface="Arial" panose="020B0604020202020204" pitchFamily="34" charset="0"/>
+              <a:buChar char="•"/>
+              <a:defRPr sz="1350" kern="1200">
+                <a:solidFill>
+                  <a:schemeClr val="tx1"/>
+                </a:solidFill>
+                <a:latin typeface="+mn-lt"/>
+                <a:ea typeface="+mn-ea"/>
+                <a:cs typeface="+mn-cs"/>
+              </a:defRPr>
+            </a:lvl9pPr>
+          </a:lstStyle>
+          <a:p>
+            <a:pPr marL="0" indent="0">
+              <a:buFont typeface="Arial" panose="020B0604020202020204" pitchFamily="34" charset="0"/>
+              <a:buNone/>
+            </a:pPr>
+            <a:r>
+              <a:rPr lang="en-US" sz="1600" b="1" dirty="0" err="1"/>
+              <a:t>Rezultati</a:t>
+            </a:r>
+            <a:r>
+              <a:rPr lang="en-US" sz="1600" b="1" dirty="0"/>
+              <a:t>/</a:t>
+            </a:r>
+            <a:r>
+              <a:rPr lang="en-US" sz="1600" b="1" dirty="0" err="1"/>
+              <a:t>dosedanje</a:t>
+            </a:r>
+            <a:r>
+              <a:rPr lang="en-US" sz="1600" b="1" dirty="0"/>
+              <a:t> </a:t>
+            </a:r>
+            <a:r>
+              <a:rPr lang="en-US" sz="1600" b="1" dirty="0" err="1"/>
+              <a:t>ugotovitve</a:t>
+            </a:r>
+            <a:r>
+              <a:rPr lang="en-US" sz="1600" b="1" dirty="0"/>
+              <a:t>/</a:t>
+            </a:r>
+            <a:r>
+              <a:rPr lang="en-US" sz="1600" b="1" dirty="0" err="1"/>
+              <a:t>odprta</a:t>
+            </a:r>
+            <a:r>
+              <a:rPr lang="en-US" sz="1600" b="1" dirty="0"/>
+              <a:t> </a:t>
+            </a:r>
+            <a:r>
+              <a:rPr lang="en-US" sz="1600" b="1" dirty="0" err="1"/>
+              <a:t>vprašanja</a:t>
+            </a:r>
+            <a:endParaRPr lang="en-US" sz="1600" b="1" dirty="0"/>
+          </a:p>
+        </p:txBody>
+      </p:sp>
+      <p:sp>
+        <p:nvSpPr>
+          <p:cNvPr id="12" name="Date Placeholder 11">
+            <a:extLst>
+              <a:ext uri="{FF2B5EF4-FFF2-40B4-BE49-F238E27FC236}">
+                <a16:creationId xmlns:a16="http://schemas.microsoft.com/office/drawing/2014/main" id="{1938F1D1-9D97-EE48-D6AC-CF5CC12ADD06}"/>
+              </a:ext>
+            </a:extLst>
+          </p:cNvPr>
+          <p:cNvSpPr>
+            <a:spLocks noGrp="1"/>
+          </p:cNvSpPr>
+          <p:nvPr>
+            <p:ph type="dt" sz="half" idx="10"/>
+          </p:nvPr>
+        </p:nvSpPr>
+        <p:spPr>
+          <a:xfrm>
+            <a:off x="76857" y="4800600"/>
+            <a:ext cx="3754164" cy="273844"/>
+          </a:xfrm>
+        </p:spPr>
+        <p:txBody>
+          <a:bodyPr/>
+          <a:lstStyle/>
+          <a:p>
+            <a:r>
+              <a:rPr lang="en-US" dirty="0"/>
+              <a:t>15. 4. 2026</a:t>
+            </a:r>
+          </a:p>
+        </p:txBody>
+      </p:sp>
+      <p:sp>
+        <p:nvSpPr>
+          <p:cNvPr id="13" name="Footer Placeholder 12">
+            <a:extLst>
+              <a:ext uri="{FF2B5EF4-FFF2-40B4-BE49-F238E27FC236}">
+                <a16:creationId xmlns:a16="http://schemas.microsoft.com/office/drawing/2014/main" id="{E29C160B-E70A-6ED5-F718-FCD419148297}"/>
+              </a:ext>
+            </a:extLst>
+          </p:cNvPr>
+          <p:cNvSpPr>
+            <a:spLocks noGrp="1"/>
+          </p:cNvSpPr>
+          <p:nvPr>
+            <p:ph type="ftr" sz="quarter" idx="11"/>
+          </p:nvPr>
+        </p:nvSpPr>
+        <p:spPr>
+          <a:xfrm>
+            <a:off x="3028950" y="4767263"/>
+            <a:ext cx="3086100" cy="273844"/>
+          </a:xfrm>
+        </p:spPr>
+        <p:txBody>
+          <a:bodyPr/>
+          <a:lstStyle/>
+          <a:p>
+            <a:r>
+              <a:rPr lang="en-US" dirty="0"/>
+              <a:t>PR25-26, </a:t>
+            </a:r>
+            <a:r>
+              <a:rPr lang="en-US" dirty="0" err="1"/>
+              <a:t>Vmesna</a:t>
+            </a:r>
+            <a:r>
+              <a:rPr lang="en-US" dirty="0"/>
+              <a:t> </a:t>
+            </a:r>
+            <a:r>
+              <a:rPr lang="en-US" dirty="0" err="1"/>
+              <a:t>predstavitev</a:t>
+            </a:r>
+            <a:endParaRPr lang="en-US" dirty="0"/>
+          </a:p>
+        </p:txBody>
+      </p:sp>
+      <p:pic>
+        <p:nvPicPr>
+          <p:cNvPr id="15" name="Picture 14">
+            <a:extLst>
+              <a:ext uri="{FF2B5EF4-FFF2-40B4-BE49-F238E27FC236}">
+                <a16:creationId xmlns:a16="http://schemas.microsoft.com/office/drawing/2014/main" id="{04595DD3-C8C9-C944-53BC-E328B778EC53}"/>
+              </a:ext>
+            </a:extLst>
+          </p:cNvPr>
+          <p:cNvPicPr>
+            <a:picLocks noChangeAspect="1"/>
+          </p:cNvPicPr>
+          <p:nvPr/>
+        </p:nvPicPr>
+        <p:blipFill>
+          <a:blip r:embed="rId2"/>
+          <a:stretch>
+            <a:fillRect/>
+          </a:stretch>
+        </p:blipFill>
+        <p:spPr>
+          <a:xfrm>
+            <a:off x="5233386" y="2409952"/>
+            <a:ext cx="3686197" cy="2286375"/>
+          </a:xfrm>
+          <a:prstGeom prst="rect">
+            <a:avLst/>
+          </a:prstGeom>
+        </p:spPr>
+      </p:pic>
+      <p:pic>
+        <p:nvPicPr>
+          <p:cNvPr id="4" name="Picture 3">
+            <a:extLst>
+              <a:ext uri="{FF2B5EF4-FFF2-40B4-BE49-F238E27FC236}">
+                <a16:creationId xmlns:a16="http://schemas.microsoft.com/office/drawing/2014/main" id="{899BEAE2-8195-8A2A-A453-A713C8032F7E}"/>
+              </a:ext>
+            </a:extLst>
+          </p:cNvPr>
+          <p:cNvPicPr>
+            <a:picLocks noChangeAspect="1"/>
+          </p:cNvPicPr>
+          <p:nvPr/>
+        </p:nvPicPr>
+        <p:blipFill>
+          <a:blip r:embed="rId3"/>
+          <a:stretch>
+            <a:fillRect/>
+          </a:stretch>
+        </p:blipFill>
+        <p:spPr>
+          <a:xfrm>
+            <a:off x="4872962" y="356232"/>
+            <a:ext cx="4046621" cy="2020383"/>
+          </a:xfrm>
+          <a:prstGeom prst="rect">
+            <a:avLst/>
+          </a:prstGeom>
+        </p:spPr>
+      </p:pic>
+    </p:spTree>
+    <p:extLst>
+      <p:ext uri="{BB962C8B-B14F-4D97-AF65-F5344CB8AC3E}">
+        <p14:creationId xmlns:p14="http://schemas.microsoft.com/office/powerpoint/2010/main" val="3375395171"/>
+      </p:ext>
+    </p:extLst>
+  </p:cSld>
+  <p:clrMapOvr>
+    <a:masterClrMapping/>
+  </p:clrMapOvr>
+</p:sld>
+</file>
+
+<file path=ppt/slides/slide4.xml><?xml version="1.0" encoding="utf-8"?>
+<p:sld xmlns:a="http://schemas.openxmlformats.org/drawingml/2006/main" xmlns:r="http://schemas.openxmlformats.org/officeDocument/2006/relationships" xmlns:p="http://schemas.openxmlformats.org/presentationml/2006/main">
+  <p:cSld>
+    <p:spTree>
+      <p:nvGrpSpPr>
+        <p:cNvPr id="1" name="">
+          <a:extLst>
+            <a:ext uri="{FF2B5EF4-FFF2-40B4-BE49-F238E27FC236}">
               <a16:creationId xmlns:a16="http://schemas.microsoft.com/office/drawing/2014/main" id="{DF62F0B2-72EB-38BF-039C-5D72B9B58840}"/>
             </a:ext>
           </a:extLst>
@@ -5721,7 +6903,7 @@
           <a:p>
             <a:fld id="{03BC8BC1-971C-5C4D-898D-87CE7EF1EB36}" type="slidenum">
               <a:rPr lang="en-US" smtClean="0"/>
-              <a:t>3</a:t>
+              <a:t>4</a:t>
             </a:fld>
             <a:endParaRPr lang="en-US"/>
           </a:p>
@@ -6546,7 +7728,7 @@
 </p:sld>
 </file>
 
-<file path=ppt/slides/slide4.xml><?xml version="1.0" encoding="utf-8"?>
+<file path=ppt/slides/slide5.xml><?xml version="1.0" encoding="utf-8"?>
 <p:sld xmlns:a="http://schemas.openxmlformats.org/drawingml/2006/main" xmlns:r="http://schemas.openxmlformats.org/officeDocument/2006/relationships" xmlns:p="http://schemas.openxmlformats.org/presentationml/2006/main">
   <p:cSld>
     <p:spTree>
@@ -6962,7 +8144,7 @@
           <a:p>
             <a:fld id="{03BC8BC1-971C-5C4D-898D-87CE7EF1EB36}" type="slidenum">
               <a:rPr lang="en-US" smtClean="0"/>
-              <a:t>4</a:t>
+              <a:t>5</a:t>
             </a:fld>
             <a:endParaRPr lang="en-US"/>
           </a:p>
@@ -7915,7 +9097,7 @@
 </p:sld>
 </file>
 
-<file path=ppt/slides/slide5.xml><?xml version="1.0" encoding="utf-8"?>
+<file path=ppt/slides/slide6.xml><?xml version="1.0" encoding="utf-8"?>
 <p:sld xmlns:a="http://schemas.openxmlformats.org/drawingml/2006/main" xmlns:r="http://schemas.openxmlformats.org/officeDocument/2006/relationships" xmlns:p="http://schemas.openxmlformats.org/presentationml/2006/main">
   <p:cSld>
     <p:spTree>
@@ -8107,7 +9289,7 @@
           <a:p>
             <a:fld id="{03BC8BC1-971C-5C4D-898D-87CE7EF1EB36}" type="slidenum">
               <a:rPr lang="en-US" smtClean="0"/>
-              <a:t>5</a:t>
+              <a:t>6</a:t>
             </a:fld>
             <a:endParaRPr lang="en-US"/>
           </a:p>

--- a/PR2025-26_VMESNA_10.pptx
+++ b/PR2025-26_VMESNA_10.pptx
@@ -5,10 +5,10 @@
     <p:sldMasterId id="2147483660" r:id="rId1"/>
   </p:sldMasterIdLst>
   <p:notesMasterIdLst>
-    <p:notesMasterId r:id="rId8"/>
+    <p:notesMasterId r:id="rId7"/>
   </p:notesMasterIdLst>
   <p:handoutMasterIdLst>
-    <p:handoutMasterId r:id="rId9"/>
+    <p:handoutMasterId r:id="rId8"/>
   </p:handoutMasterIdLst>
   <p:sldIdLst>
     <p:sldId id="256" r:id="rId2"/>
@@ -16,7 +16,6 @@
     <p:sldId id="262" r:id="rId4"/>
     <p:sldId id="261" r:id="rId5"/>
     <p:sldId id="260" r:id="rId6"/>
-    <p:sldId id="259" r:id="rId7"/>
   </p:sldIdLst>
   <p:sldSz cx="9144000" cy="5143500" type="screen16x9"/>
   <p:notesSz cx="6858000" cy="9144000"/>
@@ -5752,7 +5751,7 @@
             </a:r>
             <a:r>
               <a:rPr lang="en-GB" sz="1600" dirty="0" err="1"/>
-              <a:t>toočen</a:t>
+              <a:t>točen</a:t>
             </a:r>
             <a:r>
               <a:rPr lang="en-GB" sz="1600" dirty="0"/>
@@ -9088,296 +9087,6 @@
     <p:extLst>
       <p:ext uri="{BB962C8B-B14F-4D97-AF65-F5344CB8AC3E}">
         <p14:creationId xmlns:p14="http://schemas.microsoft.com/office/powerpoint/2010/main" val="2829983513"/>
-      </p:ext>
-    </p:extLst>
-  </p:cSld>
-  <p:clrMapOvr>
-    <a:masterClrMapping/>
-  </p:clrMapOvr>
-</p:sld>
-</file>
-
-<file path=ppt/slides/slide6.xml><?xml version="1.0" encoding="utf-8"?>
-<p:sld xmlns:a="http://schemas.openxmlformats.org/drawingml/2006/main" xmlns:r="http://schemas.openxmlformats.org/officeDocument/2006/relationships" xmlns:p="http://schemas.openxmlformats.org/presentationml/2006/main">
-  <p:cSld>
-    <p:spTree>
-      <p:nvGrpSpPr>
-        <p:cNvPr id="1" name=""/>
-        <p:cNvGrpSpPr/>
-        <p:nvPr/>
-      </p:nvGrpSpPr>
-      <p:grpSpPr>
-        <a:xfrm>
-          <a:off x="0" y="0"/>
-          <a:ext cx="0" cy="0"/>
-          <a:chOff x="0" y="0"/>
-          <a:chExt cx="0" cy="0"/>
-        </a:xfrm>
-      </p:grpSpPr>
-      <p:sp>
-        <p:nvSpPr>
-          <p:cNvPr id="2" name="Title 1">
-            <a:extLst>
-              <a:ext uri="{FF2B5EF4-FFF2-40B4-BE49-F238E27FC236}">
-                <a16:creationId xmlns:a16="http://schemas.microsoft.com/office/drawing/2014/main" id="{38032997-45F8-4B43-BA59-BC34FE1B6DF0}"/>
-              </a:ext>
-            </a:extLst>
-          </p:cNvPr>
-          <p:cNvSpPr>
-            <a:spLocks noGrp="1"/>
-          </p:cNvSpPr>
-          <p:nvPr>
-            <p:ph type="title"/>
-          </p:nvPr>
-        </p:nvSpPr>
-        <p:spPr>
-          <a:xfrm>
-            <a:off x="99391" y="102394"/>
-            <a:ext cx="8945218" cy="410942"/>
-          </a:xfrm>
-        </p:spPr>
-        <p:txBody>
-          <a:bodyPr>
-            <a:normAutofit/>
-          </a:bodyPr>
-          <a:lstStyle/>
-          <a:p>
-            <a:r>
-              <a:rPr lang="en-US" sz="1600" b="1" dirty="0" err="1">
-                <a:latin typeface="+mn-lt"/>
-              </a:rPr>
-              <a:t>Dodatna</a:t>
-            </a:r>
-            <a:r>
-              <a:rPr lang="en-US" sz="1600" b="1" dirty="0">
-                <a:latin typeface="+mn-lt"/>
-              </a:rPr>
-              <a:t> </a:t>
-            </a:r>
-            <a:r>
-              <a:rPr lang="en-US" sz="1600" b="1" dirty="0" err="1">
-                <a:latin typeface="+mn-lt"/>
-              </a:rPr>
-              <a:t>prosojnica</a:t>
-            </a:r>
-            <a:r>
-              <a:rPr lang="en-US" sz="1600" b="1" dirty="0">
-                <a:latin typeface="+mn-lt"/>
-              </a:rPr>
-              <a:t> za </a:t>
-            </a:r>
-            <a:r>
-              <a:rPr lang="en-US" sz="1600" b="1" dirty="0" err="1">
-                <a:latin typeface="+mn-lt"/>
-              </a:rPr>
-              <a:t>rezultate</a:t>
-            </a:r>
-            <a:r>
-              <a:rPr lang="en-US" sz="1600" b="1" dirty="0">
-                <a:latin typeface="+mn-lt"/>
-              </a:rPr>
-              <a:t> oz. </a:t>
-            </a:r>
-            <a:r>
-              <a:rPr lang="en-US" sz="1600" b="1" dirty="0" err="1">
-                <a:latin typeface="+mn-lt"/>
-              </a:rPr>
-              <a:t>odprta</a:t>
-            </a:r>
-            <a:r>
-              <a:rPr lang="en-US" sz="1600" b="1" dirty="0">
-                <a:latin typeface="+mn-lt"/>
-              </a:rPr>
-              <a:t> </a:t>
-            </a:r>
-            <a:r>
-              <a:rPr lang="en-US" sz="1600" b="1" dirty="0" err="1">
-                <a:latin typeface="+mn-lt"/>
-              </a:rPr>
-              <a:t>vprašanja</a:t>
-            </a:r>
-            <a:r>
-              <a:rPr lang="en-US" sz="1600" b="1" dirty="0">
-                <a:latin typeface="+mn-lt"/>
-              </a:rPr>
-              <a:t> (</a:t>
-            </a:r>
-            <a:r>
-              <a:rPr lang="en-US" sz="1600" b="1" dirty="0" err="1">
-                <a:latin typeface="+mn-lt"/>
-              </a:rPr>
-              <a:t>če</a:t>
-            </a:r>
-            <a:r>
-              <a:rPr lang="en-US" sz="1600" b="1" dirty="0">
-                <a:latin typeface="+mn-lt"/>
-              </a:rPr>
-              <a:t> </a:t>
-            </a:r>
-            <a:r>
-              <a:rPr lang="en-US" sz="1600" b="1" dirty="0" err="1">
-                <a:latin typeface="+mn-lt"/>
-              </a:rPr>
-              <a:t>potrebno</a:t>
-            </a:r>
-            <a:r>
-              <a:rPr lang="en-US" sz="1600" b="1" dirty="0">
-                <a:latin typeface="+mn-lt"/>
-              </a:rPr>
-              <a:t>)</a:t>
-            </a:r>
-          </a:p>
-        </p:txBody>
-      </p:sp>
-      <p:sp>
-        <p:nvSpPr>
-          <p:cNvPr id="3" name="Content Placeholder 2">
-            <a:extLst>
-              <a:ext uri="{FF2B5EF4-FFF2-40B4-BE49-F238E27FC236}">
-                <a16:creationId xmlns:a16="http://schemas.microsoft.com/office/drawing/2014/main" id="{E736DCB2-1C93-E142-85FE-F367FBA7EB28}"/>
-              </a:ext>
-            </a:extLst>
-          </p:cNvPr>
-          <p:cNvSpPr>
-            <a:spLocks noGrp="1"/>
-          </p:cNvSpPr>
-          <p:nvPr>
-            <p:ph idx="1"/>
-          </p:nvPr>
-        </p:nvSpPr>
-        <p:spPr>
-          <a:xfrm>
-            <a:off x="99392" y="513336"/>
-            <a:ext cx="8945217" cy="4253927"/>
-          </a:xfrm>
-          <a:ln>
-            <a:solidFill>
-              <a:schemeClr val="tx1"/>
-            </a:solidFill>
-          </a:ln>
-        </p:spPr>
-        <p:txBody>
-          <a:bodyPr>
-            <a:normAutofit/>
-          </a:bodyPr>
-          <a:lstStyle/>
-          <a:p>
-            <a:endParaRPr lang="en-US" sz="1600" dirty="0"/>
-          </a:p>
-        </p:txBody>
-      </p:sp>
-      <p:sp>
-        <p:nvSpPr>
-          <p:cNvPr id="6" name="Slide Number Placeholder 5">
-            <a:extLst>
-              <a:ext uri="{FF2B5EF4-FFF2-40B4-BE49-F238E27FC236}">
-                <a16:creationId xmlns:a16="http://schemas.microsoft.com/office/drawing/2014/main" id="{643A65B7-6F2E-D145-A02C-A24F07A611A3}"/>
-              </a:ext>
-            </a:extLst>
-          </p:cNvPr>
-          <p:cNvSpPr>
-            <a:spLocks noGrp="1"/>
-          </p:cNvSpPr>
-          <p:nvPr>
-            <p:ph type="sldNum" sz="quarter" idx="12"/>
-          </p:nvPr>
-        </p:nvSpPr>
-        <p:spPr/>
-        <p:txBody>
-          <a:bodyPr/>
-          <a:lstStyle/>
-          <a:p>
-            <a:fld id="{03BC8BC1-971C-5C4D-898D-87CE7EF1EB36}" type="slidenum">
-              <a:rPr lang="en-US" smtClean="0"/>
-              <a:t>6</a:t>
-            </a:fld>
-            <a:endParaRPr lang="en-US"/>
-          </a:p>
-        </p:txBody>
-      </p:sp>
-      <p:sp>
-        <p:nvSpPr>
-          <p:cNvPr id="8" name="Date Placeholder 11">
-            <a:extLst>
-              <a:ext uri="{FF2B5EF4-FFF2-40B4-BE49-F238E27FC236}">
-                <a16:creationId xmlns:a16="http://schemas.microsoft.com/office/drawing/2014/main" id="{07C4AC33-717C-454A-96DC-39E4E45FC358}"/>
-              </a:ext>
-            </a:extLst>
-          </p:cNvPr>
-          <p:cNvSpPr>
-            <a:spLocks noGrp="1"/>
-          </p:cNvSpPr>
-          <p:nvPr>
-            <p:ph type="dt" sz="half" idx="10"/>
-          </p:nvPr>
-        </p:nvSpPr>
-        <p:spPr>
-          <a:xfrm>
-            <a:off x="76857" y="4800600"/>
-            <a:ext cx="3754164" cy="273844"/>
-          </a:xfrm>
-        </p:spPr>
-        <p:txBody>
-          <a:bodyPr/>
-          <a:lstStyle/>
-          <a:p>
-            <a:r>
-              <a:rPr lang="en-US" dirty="0"/>
-              <a:t>15. 4. 2026</a:t>
-            </a:r>
-          </a:p>
-        </p:txBody>
-      </p:sp>
-      <p:sp>
-        <p:nvSpPr>
-          <p:cNvPr id="9" name="Footer Placeholder 12">
-            <a:extLst>
-              <a:ext uri="{FF2B5EF4-FFF2-40B4-BE49-F238E27FC236}">
-                <a16:creationId xmlns:a16="http://schemas.microsoft.com/office/drawing/2014/main" id="{1E484604-5097-374A-BB61-C5B3CD4C807B}"/>
-              </a:ext>
-            </a:extLst>
-          </p:cNvPr>
-          <p:cNvSpPr>
-            <a:spLocks noGrp="1"/>
-          </p:cNvSpPr>
-          <p:nvPr>
-            <p:ph type="ftr" sz="quarter" idx="11"/>
-          </p:nvPr>
-        </p:nvSpPr>
-        <p:spPr>
-          <a:xfrm>
-            <a:off x="3028950" y="4767263"/>
-            <a:ext cx="3086100" cy="273844"/>
-          </a:xfrm>
-        </p:spPr>
-        <p:txBody>
-          <a:bodyPr/>
-          <a:lstStyle/>
-          <a:p>
-            <a:r>
-              <a:rPr lang="en-US" dirty="0"/>
-              <a:t>PR25-26, </a:t>
-            </a:r>
-            <a:r>
-              <a:rPr lang="en-US" dirty="0" err="1"/>
-              <a:t>Vmesna</a:t>
-            </a:r>
-            <a:r>
-              <a:rPr lang="en-US" dirty="0"/>
-              <a:t> </a:t>
-            </a:r>
-            <a:r>
-              <a:rPr lang="en-US" dirty="0" err="1"/>
-              <a:t>predstavitev</a:t>
-            </a:r>
-            <a:endParaRPr lang="en-US" dirty="0"/>
-          </a:p>
-        </p:txBody>
-      </p:sp>
-    </p:spTree>
-    <p:extLst>
-      <p:ext uri="{BB962C8B-B14F-4D97-AF65-F5344CB8AC3E}">
-        <p14:creationId xmlns:p14="http://schemas.microsoft.com/office/powerpoint/2010/main" val="3280023697"/>
       </p:ext>
     </p:extLst>
   </p:cSld>
